--- a/Video/Strassen.pptx
+++ b/Video/Strassen.pptx
@@ -4,19 +4,22 @@
   <p:sldMasterIdLst>
     <p:sldMasterId id="2147483648" r:id="rId1"/>
   </p:sldMasterIdLst>
+  <p:notesMasterIdLst>
+    <p:notesMasterId r:id="rId12"/>
+  </p:notesMasterIdLst>
   <p:sldIdLst>
-    <p:sldId id="256" r:id="rId7"/>
-    <p:sldId id="257" r:id="rId9"/>
-    <p:sldId id="258" r:id="rId10"/>
-    <p:sldId id="259" r:id="rId11"/>
-    <p:sldId id="260" r:id="rId12"/>
-    <p:sldId id="261" r:id="rId13"/>
-    <p:sldId id="262" r:id="rId14"/>
-    <p:sldId id="263" r:id="rId15"/>
-    <p:sldId id="264" r:id="rId16"/>
-    <p:sldId id="265" r:id="rId17"/>
+    <p:sldId id="256" r:id="rId2"/>
+    <p:sldId id="257" r:id="rId3"/>
+    <p:sldId id="258" r:id="rId4"/>
+    <p:sldId id="259" r:id="rId5"/>
+    <p:sldId id="260" r:id="rId6"/>
+    <p:sldId id="261" r:id="rId7"/>
+    <p:sldId id="262" r:id="rId8"/>
+    <p:sldId id="263" r:id="rId9"/>
+    <p:sldId id="264" r:id="rId10"/>
+    <p:sldId id="265" r:id="rId11"/>
   </p:sldIdLst>
-  <p:sldSz cx="12191695" cy="6858000" type="screen4x3"/>
+  <p:sldSz cx="12192000" cy="6858000"/>
   <p:notesSz cx="6858000" cy="9144000"/>
   <p:defaultTextStyle>
     <a:defPPr>
@@ -113,11 +116,27 @@
       </a:defRPr>
     </a:lvl9pPr>
   </p:defaultTextStyle>
+  <p:extLst>
+    <p:ext uri="{EFAFB233-063F-42B5-8137-9DF3F51BA10A}">
+      <p15:sldGuideLst xmlns:p15="http://schemas.microsoft.com/office/powerpoint/2012/main">
+        <p15:guide id="1" orient="horz" pos="2160">
+          <p15:clr>
+            <a:srgbClr val="A4A3A4"/>
+          </p15:clr>
+        </p15:guide>
+        <p15:guide id="2" pos="2880">
+          <p15:clr>
+            <a:srgbClr val="A4A3A4"/>
+          </p15:clr>
+        </p15:guide>
+      </p15:sldGuideLst>
+    </p:ext>
+  </p:extLst>
 </p:presentation>
 </file>
 
 <file path=ppt/notesMasters/notesMaster1.xml><?xml version="1.0" encoding="utf-8"?>
-<p:notesMaster xmlns:a="http://schemas.openxmlformats.org/drawingml/2006/main" xmlns:p="http://schemas.openxmlformats.org/presentationml/2006/main" xmlns:r="http://schemas.openxmlformats.org/officeDocument/2006/relationships">
+<p:notesMaster xmlns:a="http://schemas.openxmlformats.org/drawingml/2006/main" xmlns:r="http://schemas.openxmlformats.org/officeDocument/2006/relationships" xmlns:p="http://schemas.openxmlformats.org/presentationml/2006/main">
   <p:cSld>
     <p:bg>
       <p:bgRef idx="1001">
@@ -138,241 +157,16 @@
           <a:chExt cx="0" cy="0"/>
         </a:xfrm>
       </p:grpSpPr>
-      <p:sp>
-        <p:nvSpPr>
-          <p:cNvPr id="2" name="Header Placeholder 1"/>
-          <p:cNvSpPr>
-            <a:spLocks noGrp="1"/>
-          </p:cNvSpPr>
-          <p:nvPr>
-            <p:ph type="hdr" sz="quarter"/>
-          </p:nvPr>
-        </p:nvSpPr>
-        <p:spPr>
-          <a:xfrm>
-            <a:off x="0" y="0"/>
-            <a:ext cx="2971800" cy="457200"/>
-          </a:xfrm>
-          <a:prstGeom prst="rect">
-            <a:avLst/>
-          </a:prstGeom>
-        </p:spPr>
-        <p:txBody>
-          <a:bodyPr vert="horz" lIns="91440" tIns="45720" rIns="91440" bIns="45720" rtlCol="0"/>
-          <a:lstStyle>
-            <a:lvl1pPr algn="l">
-              <a:defRPr sz="1200"/>
-            </a:lvl1pPr>
-          </a:lstStyle>
-          <a:p>
-            <a:endParaRPr lang="en-US"/>
-          </a:p>
-        </p:txBody>
-      </p:sp>
-      <p:sp>
-        <p:nvSpPr>
-          <p:cNvPr id="3" name="Date Placeholder 2"/>
-          <p:cNvSpPr>
-            <a:spLocks noGrp="1"/>
-          </p:cNvSpPr>
-          <p:nvPr>
-            <p:ph type="dt" idx="1"/>
-          </p:nvPr>
-        </p:nvSpPr>
-        <p:spPr>
-          <a:xfrm>
-            <a:off x="3884613" y="0"/>
-            <a:ext cx="2971800" cy="457200"/>
-          </a:xfrm>
-          <a:prstGeom prst="rect">
-            <a:avLst/>
-          </a:prstGeom>
-        </p:spPr>
-        <p:txBody>
-          <a:bodyPr vert="horz" lIns="91440" tIns="45720" rIns="91440" bIns="45720" rtlCol="0"/>
-          <a:lstStyle>
-            <a:lvl1pPr algn="r">
-              <a:defRPr sz="1200"/>
-            </a:lvl1pPr>
-          </a:lstStyle>
-          <a:p>
-            <a:fld id="{0F89C1C7-3DCD-1040-A9CF-14679D8B5DDD}" type="datetimeFigureOut">
-              <a:rPr lang="en-US" smtClean="0"/>
-              <a:t>10/17/16</a:t>
-            </a:fld>
-            <a:endParaRPr lang="en-US"/>
-          </a:p>
-        </p:txBody>
-      </p:sp>
-      <p:sp>
-        <p:nvSpPr>
-          <p:cNvPr id="4" name="Slide Image Placeholder 3"/>
-          <p:cNvSpPr>
-            <a:spLocks noGrp="1" noRot="1" noChangeAspect="1"/>
-          </p:cNvSpPr>
-          <p:nvPr>
-            <p:ph type="sldImg" idx="2"/>
-          </p:nvPr>
-        </p:nvSpPr>
-        <p:spPr>
-          <a:xfrm>
-            <a:off x="1143000" y="685800"/>
-            <a:ext cx="4572000" cy="3429000"/>
-          </a:xfrm>
-          <a:prstGeom prst="rect">
-            <a:avLst/>
-          </a:prstGeom>
-          <a:noFill/>
-          <a:ln w="12700">
-            <a:solidFill>
-              <a:prstClr val="black"/>
-            </a:solidFill>
-          </a:ln>
-        </p:spPr>
-        <p:txBody>
-          <a:bodyPr vert="horz" lIns="91440" tIns="45720" rIns="91440" bIns="45720" rtlCol="0" anchor="ctr"/>
-          <a:lstStyle/>
-          <a:p>
-            <a:endParaRPr lang="en-US"/>
-          </a:p>
-        </p:txBody>
-      </p:sp>
-      <p:sp>
-        <p:nvSpPr>
-          <p:cNvPr id="5" name="Notes Placeholder 4"/>
-          <p:cNvSpPr>
-            <a:spLocks noGrp="1"/>
-          </p:cNvSpPr>
-          <p:nvPr>
-            <p:ph type="body" sz="quarter" idx="3"/>
-          </p:nvPr>
-        </p:nvSpPr>
-        <p:spPr>
-          <a:xfrm>
-            <a:off x="685800" y="4343400"/>
-            <a:ext cx="5486400" cy="4114800"/>
-          </a:xfrm>
-          <a:prstGeom prst="rect">
-            <a:avLst/>
-          </a:prstGeom>
-        </p:spPr>
-        <p:txBody>
-          <a:bodyPr vert="horz" lIns="91440" tIns="45720" rIns="91440" bIns="45720" rtlCol="0"/>
-          <a:lstStyle/>
-          <a:p>
-            <a:pPr lvl="0"/>
-            <a:r>
-              <a:rPr lang="en-US" smtClean="0"/>
-              <a:t>Click to edit Master text styles</a:t>
-            </a:r>
-          </a:p>
-          <a:p>
-            <a:pPr lvl="1"/>
-            <a:r>
-              <a:rPr lang="en-US" smtClean="0"/>
-              <a:t>Second level</a:t>
-            </a:r>
-          </a:p>
-          <a:p>
-            <a:pPr lvl="2"/>
-            <a:r>
-              <a:rPr lang="en-US" smtClean="0"/>
-              <a:t>Third level</a:t>
-            </a:r>
-          </a:p>
-          <a:p>
-            <a:pPr lvl="3"/>
-            <a:r>
-              <a:rPr lang="en-US" smtClean="0"/>
-              <a:t>Fourth level</a:t>
-            </a:r>
-          </a:p>
-          <a:p>
-            <a:pPr lvl="4"/>
-            <a:r>
-              <a:rPr lang="en-US" smtClean="0"/>
-              <a:t>Fifth level</a:t>
-            </a:r>
-            <a:endParaRPr lang="en-US"/>
-          </a:p>
-        </p:txBody>
-      </p:sp>
-      <p:sp>
-        <p:nvSpPr>
-          <p:cNvPr id="6" name="Footer Placeholder 5"/>
-          <p:cNvSpPr>
-            <a:spLocks noGrp="1"/>
-          </p:cNvSpPr>
-          <p:nvPr>
-            <p:ph type="ftr" sz="quarter" idx="4"/>
-          </p:nvPr>
-        </p:nvSpPr>
-        <p:spPr>
-          <a:xfrm>
-            <a:off x="0" y="8685213"/>
-            <a:ext cx="2971800" cy="457200"/>
-          </a:xfrm>
-          <a:prstGeom prst="rect">
-            <a:avLst/>
-          </a:prstGeom>
-        </p:spPr>
-        <p:txBody>
-          <a:bodyPr vert="horz" lIns="91440" tIns="45720" rIns="91440" bIns="45720" rtlCol="0" anchor="b"/>
-          <a:lstStyle>
-            <a:lvl1pPr algn="l">
-              <a:defRPr sz="1200"/>
-            </a:lvl1pPr>
-          </a:lstStyle>
-          <a:p>
-            <a:endParaRPr lang="en-US"/>
-          </a:p>
-        </p:txBody>
-      </p:sp>
-      <p:sp>
-        <p:nvSpPr>
-          <p:cNvPr id="7" name="Slide Number Placeholder 6"/>
-          <p:cNvSpPr>
-            <a:spLocks noGrp="1"/>
-          </p:cNvSpPr>
-          <p:nvPr>
-            <p:ph type="sldNum" sz="quarter" idx="5"/>
-          </p:nvPr>
-        </p:nvSpPr>
-        <p:spPr>
-          <a:xfrm>
-            <a:off x="3884613" y="8685213"/>
-            <a:ext cx="2971800" cy="457200"/>
-          </a:xfrm>
-          <a:prstGeom prst="rect">
-            <a:avLst/>
-          </a:prstGeom>
-        </p:spPr>
-        <p:txBody>
-          <a:bodyPr vert="horz" lIns="91440" tIns="45720" rIns="91440" bIns="45720" rtlCol="0" anchor="b"/>
-          <a:lstStyle>
-            <a:lvl1pPr algn="r">
-              <a:defRPr sz="1200"/>
-            </a:lvl1pPr>
-          </a:lstStyle>
-          <a:p>
-            <a:fld id="{BB5E49A5-4136-284D-997B-48E1D791AD67}" type="slidenum">
-              <a:rPr lang="en-US" smtClean="0"/>
-              <a:t>‹#›</a:t>
-            </a:fld>
-            <a:endParaRPr lang="en-US"/>
-          </a:p>
-        </p:txBody>
-      </p:sp>
     </p:spTree>
     <p:extLst>
       <p:ext uri="{BB962C8B-B14F-4D97-AF65-F5344CB8AC3E}">
-        <p14:creationId xmlns:p14="http://schemas.microsoft.com/office/powerpoint/2010/main" val="2623252185"/>
+        <p14:creationId xmlns:p14="http://schemas.microsoft.com/office/powerpoint/2010/main" val="2474226710"/>
       </p:ext>
     </p:extLst>
   </p:cSld>
   <p:clrMap bg1="lt1" tx1="dk1" bg2="lt2" tx2="dk2" accent1="accent1" accent2="accent2" accent3="accent3" accent4="accent4" accent5="accent5" accent6="accent6" hlink="hlink" folHlink="folHlink"/>
   <p:notesStyle>
-    <a:lvl1pPr marL="0" algn="l" defTabSz="457200" rtl="0" eaLnBrk="1" latinLnBrk="0" hangingPunct="1">
+    <a:lvl1pPr marL="0" algn="l" defTabSz="914400" rtl="0" eaLnBrk="1" latinLnBrk="0" hangingPunct="1">
       <a:defRPr sz="1200" kern="1200">
         <a:solidFill>
           <a:schemeClr val="tx1"/>
@@ -382,7 +176,7 @@
         <a:cs typeface="+mn-cs"/>
       </a:defRPr>
     </a:lvl1pPr>
-    <a:lvl2pPr marL="457200" algn="l" defTabSz="457200" rtl="0" eaLnBrk="1" latinLnBrk="0" hangingPunct="1">
+    <a:lvl2pPr marL="457200" algn="l" defTabSz="914400" rtl="0" eaLnBrk="1" latinLnBrk="0" hangingPunct="1">
       <a:defRPr sz="1200" kern="1200">
         <a:solidFill>
           <a:schemeClr val="tx1"/>
@@ -392,7 +186,7 @@
         <a:cs typeface="+mn-cs"/>
       </a:defRPr>
     </a:lvl2pPr>
-    <a:lvl3pPr marL="914400" algn="l" defTabSz="457200" rtl="0" eaLnBrk="1" latinLnBrk="0" hangingPunct="1">
+    <a:lvl3pPr marL="914400" algn="l" defTabSz="914400" rtl="0" eaLnBrk="1" latinLnBrk="0" hangingPunct="1">
       <a:defRPr sz="1200" kern="1200">
         <a:solidFill>
           <a:schemeClr val="tx1"/>
@@ -402,7 +196,7 @@
         <a:cs typeface="+mn-cs"/>
       </a:defRPr>
     </a:lvl3pPr>
-    <a:lvl4pPr marL="1371600" algn="l" defTabSz="457200" rtl="0" eaLnBrk="1" latinLnBrk="0" hangingPunct="1">
+    <a:lvl4pPr marL="1371600" algn="l" defTabSz="914400" rtl="0" eaLnBrk="1" latinLnBrk="0" hangingPunct="1">
       <a:defRPr sz="1200" kern="1200">
         <a:solidFill>
           <a:schemeClr val="tx1"/>
@@ -412,7 +206,7 @@
         <a:cs typeface="+mn-cs"/>
       </a:defRPr>
     </a:lvl4pPr>
-    <a:lvl5pPr marL="1828800" algn="l" defTabSz="457200" rtl="0" eaLnBrk="1" latinLnBrk="0" hangingPunct="1">
+    <a:lvl5pPr marL="1828800" algn="l" defTabSz="914400" rtl="0" eaLnBrk="1" latinLnBrk="0" hangingPunct="1">
       <a:defRPr sz="1200" kern="1200">
         <a:solidFill>
           <a:schemeClr val="tx1"/>
@@ -422,7 +216,7 @@
         <a:cs typeface="+mn-cs"/>
       </a:defRPr>
     </a:lvl5pPr>
-    <a:lvl6pPr marL="2286000" algn="l" defTabSz="457200" rtl="0" eaLnBrk="1" latinLnBrk="0" hangingPunct="1">
+    <a:lvl6pPr marL="2286000" algn="l" defTabSz="914400" rtl="0" eaLnBrk="1" latinLnBrk="0" hangingPunct="1">
       <a:defRPr sz="1200" kern="1200">
         <a:solidFill>
           <a:schemeClr val="tx1"/>
@@ -432,7 +226,7 @@
         <a:cs typeface="+mn-cs"/>
       </a:defRPr>
     </a:lvl6pPr>
-    <a:lvl7pPr marL="2743200" algn="l" defTabSz="457200" rtl="0" eaLnBrk="1" latinLnBrk="0" hangingPunct="1">
+    <a:lvl7pPr marL="2743200" algn="l" defTabSz="914400" rtl="0" eaLnBrk="1" latinLnBrk="0" hangingPunct="1">
       <a:defRPr sz="1200" kern="1200">
         <a:solidFill>
           <a:schemeClr val="tx1"/>
@@ -442,7 +236,7 @@
         <a:cs typeface="+mn-cs"/>
       </a:defRPr>
     </a:lvl7pPr>
-    <a:lvl8pPr marL="3200400" algn="l" defTabSz="457200" rtl="0" eaLnBrk="1" latinLnBrk="0" hangingPunct="1">
+    <a:lvl8pPr marL="3200400" algn="l" defTabSz="914400" rtl="0" eaLnBrk="1" latinLnBrk="0" hangingPunct="1">
       <a:defRPr sz="1200" kern="1200">
         <a:solidFill>
           <a:schemeClr val="tx1"/>
@@ -452,7 +246,7 @@
         <a:cs typeface="+mn-cs"/>
       </a:defRPr>
     </a:lvl8pPr>
-    <a:lvl9pPr marL="3657600" algn="l" defTabSz="457200" rtl="0" eaLnBrk="1" latinLnBrk="0" hangingPunct="1">
+    <a:lvl9pPr marL="3657600" algn="l" defTabSz="914400" rtl="0" eaLnBrk="1" latinLnBrk="0" hangingPunct="1">
       <a:defRPr sz="1200" kern="1200">
         <a:solidFill>
           <a:schemeClr val="tx1"/>
@@ -467,7 +261,7 @@
 </file>
 
 <file path=ppt/notesSlides/notesSlide1.xml><?xml version="1.0" encoding="utf-8"?>
-<p:notes xmlns:a="http://schemas.openxmlformats.org/drawingml/2006/main" xmlns:p="http://schemas.openxmlformats.org/presentationml/2006/main" xmlns:r="http://schemas.openxmlformats.org/officeDocument/2006/relationships">
+<p:notes xmlns:a="http://schemas.openxmlformats.org/drawingml/2006/main" xmlns:r="http://schemas.openxmlformats.org/officeDocument/2006/relationships" xmlns:p="http://schemas.openxmlformats.org/presentationml/2006/main">
   <p:cSld>
     <p:spTree>
       <p:nvGrpSpPr>
@@ -487,7 +281,7 @@
         <p:nvSpPr>
           <p:cNvPr id="2" name="Slide Image Placeholder 1"/>
           <p:cNvSpPr>
-            <a:spLocks noGrp="1"/>
+            <a:spLocks noGrp="1" noRot="1" noChangeAspect="1"/>
           </p:cNvSpPr>
           <p:nvPr>
             <p:ph type="sldImg" idx="2"/>
@@ -502,7 +296,7 @@
             <a:spLocks noGrp="1"/>
           </p:cNvSpPr>
           <p:nvPr>
-            <p:ph type="body" idx="3" sz="quarter"/>
+            <p:ph type="body" sz="quarter" idx="3"/>
           </p:nvPr>
         </p:nvSpPr>
         <p:spPr/>
@@ -528,7 +322,7 @@
             <a:spLocks noGrp="1"/>
           </p:cNvSpPr>
           <p:nvPr>
-            <p:ph type="sldNum" idx="5" sz="quarter"/>
+            <p:ph type="sldNum" sz="quarter" idx="5"/>
           </p:nvPr>
         </p:nvSpPr>
         <p:spPr/>
@@ -542,7 +336,7 @@
 </file>
 
 <file path=ppt/notesSlides/notesSlide10.xml><?xml version="1.0" encoding="utf-8"?>
-<p:notes xmlns:a="http://schemas.openxmlformats.org/drawingml/2006/main" xmlns:p="http://schemas.openxmlformats.org/presentationml/2006/main" xmlns:r="http://schemas.openxmlformats.org/officeDocument/2006/relationships">
+<p:notes xmlns:a="http://schemas.openxmlformats.org/drawingml/2006/main" xmlns:r="http://schemas.openxmlformats.org/officeDocument/2006/relationships" xmlns:p="http://schemas.openxmlformats.org/presentationml/2006/main">
   <p:cSld>
     <p:spTree>
       <p:nvGrpSpPr>
@@ -562,7 +356,7 @@
         <p:nvSpPr>
           <p:cNvPr id="2" name="Slide Image Placeholder 1"/>
           <p:cNvSpPr>
-            <a:spLocks noGrp="1"/>
+            <a:spLocks noGrp="1" noRot="1" noChangeAspect="1"/>
           </p:cNvSpPr>
           <p:nvPr>
             <p:ph type="sldImg" idx="2"/>
@@ -577,7 +371,7 @@
             <a:spLocks noGrp="1"/>
           </p:cNvSpPr>
           <p:nvPr>
-            <p:ph type="body" idx="3" sz="quarter"/>
+            <p:ph type="body" sz="quarter" idx="3"/>
           </p:nvPr>
         </p:nvSpPr>
         <p:spPr/>
@@ -598,7 +392,7 @@
             <a:spLocks noGrp="1"/>
           </p:cNvSpPr>
           <p:nvPr>
-            <p:ph type="sldNum" idx="5" sz="quarter"/>
+            <p:ph type="sldNum" sz="quarter" idx="5"/>
           </p:nvPr>
         </p:nvSpPr>
         <p:spPr/>
@@ -612,7 +406,7 @@
 </file>
 
 <file path=ppt/notesSlides/notesSlide2.xml><?xml version="1.0" encoding="utf-8"?>
-<p:notes xmlns:a="http://schemas.openxmlformats.org/drawingml/2006/main" xmlns:p="http://schemas.openxmlformats.org/presentationml/2006/main" xmlns:r="http://schemas.openxmlformats.org/officeDocument/2006/relationships">
+<p:notes xmlns:a="http://schemas.openxmlformats.org/drawingml/2006/main" xmlns:r="http://schemas.openxmlformats.org/officeDocument/2006/relationships" xmlns:p="http://schemas.openxmlformats.org/presentationml/2006/main">
   <p:cSld>
     <p:spTree>
       <p:nvGrpSpPr>
@@ -632,7 +426,7 @@
         <p:nvSpPr>
           <p:cNvPr id="2" name="Slide Image Placeholder 1"/>
           <p:cNvSpPr>
-            <a:spLocks noGrp="1"/>
+            <a:spLocks noGrp="1" noRot="1" noChangeAspect="1"/>
           </p:cNvSpPr>
           <p:nvPr>
             <p:ph type="sldImg" idx="2"/>
@@ -647,7 +441,7 @@
             <a:spLocks noGrp="1"/>
           </p:cNvSpPr>
           <p:nvPr>
-            <p:ph type="body" idx="3" sz="quarter"/>
+            <p:ph type="body" sz="quarter" idx="3"/>
           </p:nvPr>
         </p:nvSpPr>
         <p:spPr/>
@@ -673,7 +467,7 @@
             <a:spLocks noGrp="1"/>
           </p:cNvSpPr>
           <p:nvPr>
-            <p:ph type="sldNum" idx="5" sz="quarter"/>
+            <p:ph type="sldNum" sz="quarter" idx="5"/>
           </p:nvPr>
         </p:nvSpPr>
         <p:spPr/>
@@ -687,7 +481,7 @@
 </file>
 
 <file path=ppt/notesSlides/notesSlide3.xml><?xml version="1.0" encoding="utf-8"?>
-<p:notes xmlns:a="http://schemas.openxmlformats.org/drawingml/2006/main" xmlns:p="http://schemas.openxmlformats.org/presentationml/2006/main" xmlns:r="http://schemas.openxmlformats.org/officeDocument/2006/relationships">
+<p:notes xmlns:a="http://schemas.openxmlformats.org/drawingml/2006/main" xmlns:r="http://schemas.openxmlformats.org/officeDocument/2006/relationships" xmlns:p="http://schemas.openxmlformats.org/presentationml/2006/main">
   <p:cSld>
     <p:spTree>
       <p:nvGrpSpPr>
@@ -707,7 +501,7 @@
         <p:nvSpPr>
           <p:cNvPr id="2" name="Slide Image Placeholder 1"/>
           <p:cNvSpPr>
-            <a:spLocks noGrp="1"/>
+            <a:spLocks noGrp="1" noRot="1" noChangeAspect="1"/>
           </p:cNvSpPr>
           <p:nvPr>
             <p:ph type="sldImg" idx="2"/>
@@ -722,7 +516,7 @@
             <a:spLocks noGrp="1"/>
           </p:cNvSpPr>
           <p:nvPr>
-            <p:ph type="body" idx="3" sz="quarter"/>
+            <p:ph type="body" sz="quarter" idx="3"/>
           </p:nvPr>
         </p:nvSpPr>
         <p:spPr/>
@@ -748,7 +542,7 @@
             <a:spLocks noGrp="1"/>
           </p:cNvSpPr>
           <p:nvPr>
-            <p:ph type="sldNum" idx="5" sz="quarter"/>
+            <p:ph type="sldNum" sz="quarter" idx="5"/>
           </p:nvPr>
         </p:nvSpPr>
         <p:spPr/>
@@ -762,7 +556,7 @@
 </file>
 
 <file path=ppt/notesSlides/notesSlide4.xml><?xml version="1.0" encoding="utf-8"?>
-<p:notes xmlns:a="http://schemas.openxmlformats.org/drawingml/2006/main" xmlns:p="http://schemas.openxmlformats.org/presentationml/2006/main" xmlns:r="http://schemas.openxmlformats.org/officeDocument/2006/relationships">
+<p:notes xmlns:a="http://schemas.openxmlformats.org/drawingml/2006/main" xmlns:r="http://schemas.openxmlformats.org/officeDocument/2006/relationships" xmlns:p="http://schemas.openxmlformats.org/presentationml/2006/main">
   <p:cSld>
     <p:spTree>
       <p:nvGrpSpPr>
@@ -782,7 +576,7 @@
         <p:nvSpPr>
           <p:cNvPr id="2" name="Slide Image Placeholder 1"/>
           <p:cNvSpPr>
-            <a:spLocks noGrp="1"/>
+            <a:spLocks noGrp="1" noRot="1" noChangeAspect="1"/>
           </p:cNvSpPr>
           <p:nvPr>
             <p:ph type="sldImg" idx="2"/>
@@ -797,7 +591,7 @@
             <a:spLocks noGrp="1"/>
           </p:cNvSpPr>
           <p:nvPr>
-            <p:ph type="body" idx="3" sz="quarter"/>
+            <p:ph type="body" sz="quarter" idx="3"/>
           </p:nvPr>
         </p:nvSpPr>
         <p:spPr/>
@@ -823,7 +617,7 @@
             <a:spLocks noGrp="1"/>
           </p:cNvSpPr>
           <p:nvPr>
-            <p:ph type="sldNum" idx="5" sz="quarter"/>
+            <p:ph type="sldNum" sz="quarter" idx="5"/>
           </p:nvPr>
         </p:nvSpPr>
         <p:spPr/>
@@ -837,7 +631,7 @@
 </file>
 
 <file path=ppt/notesSlides/notesSlide5.xml><?xml version="1.0" encoding="utf-8"?>
-<p:notes xmlns:a="http://schemas.openxmlformats.org/drawingml/2006/main" xmlns:p="http://schemas.openxmlformats.org/presentationml/2006/main" xmlns:r="http://schemas.openxmlformats.org/officeDocument/2006/relationships">
+<p:notes xmlns:a="http://schemas.openxmlformats.org/drawingml/2006/main" xmlns:r="http://schemas.openxmlformats.org/officeDocument/2006/relationships" xmlns:p="http://schemas.openxmlformats.org/presentationml/2006/main">
   <p:cSld>
     <p:spTree>
       <p:nvGrpSpPr>
@@ -857,7 +651,7 @@
         <p:nvSpPr>
           <p:cNvPr id="2" name="Slide Image Placeholder 1"/>
           <p:cNvSpPr>
-            <a:spLocks noGrp="1"/>
+            <a:spLocks noGrp="1" noRot="1" noChangeAspect="1"/>
           </p:cNvSpPr>
           <p:nvPr>
             <p:ph type="sldImg" idx="2"/>
@@ -872,7 +666,7 @@
             <a:spLocks noGrp="1"/>
           </p:cNvSpPr>
           <p:nvPr>
-            <p:ph type="body" idx="3" sz="quarter"/>
+            <p:ph type="body" sz="quarter" idx="3"/>
           </p:nvPr>
         </p:nvSpPr>
         <p:spPr/>
@@ -898,7 +692,7 @@
             <a:spLocks noGrp="1"/>
           </p:cNvSpPr>
           <p:nvPr>
-            <p:ph type="sldNum" idx="5" sz="quarter"/>
+            <p:ph type="sldNum" sz="quarter" idx="5"/>
           </p:nvPr>
         </p:nvSpPr>
         <p:spPr/>
@@ -912,7 +706,7 @@
 </file>
 
 <file path=ppt/notesSlides/notesSlide6.xml><?xml version="1.0" encoding="utf-8"?>
-<p:notes xmlns:a="http://schemas.openxmlformats.org/drawingml/2006/main" xmlns:p="http://schemas.openxmlformats.org/presentationml/2006/main" xmlns:r="http://schemas.openxmlformats.org/officeDocument/2006/relationships">
+<p:notes xmlns:a="http://schemas.openxmlformats.org/drawingml/2006/main" xmlns:r="http://schemas.openxmlformats.org/officeDocument/2006/relationships" xmlns:p="http://schemas.openxmlformats.org/presentationml/2006/main">
   <p:cSld>
     <p:spTree>
       <p:nvGrpSpPr>
@@ -932,7 +726,7 @@
         <p:nvSpPr>
           <p:cNvPr id="2" name="Slide Image Placeholder 1"/>
           <p:cNvSpPr>
-            <a:spLocks noGrp="1"/>
+            <a:spLocks noGrp="1" noRot="1" noChangeAspect="1"/>
           </p:cNvSpPr>
           <p:nvPr>
             <p:ph type="sldImg" idx="2"/>
@@ -947,7 +741,7 @@
             <a:spLocks noGrp="1"/>
           </p:cNvSpPr>
           <p:nvPr>
-            <p:ph type="body" idx="3" sz="quarter"/>
+            <p:ph type="body" sz="quarter" idx="3"/>
           </p:nvPr>
         </p:nvSpPr>
         <p:spPr/>
@@ -968,7 +762,7 @@
             <a:spLocks noGrp="1"/>
           </p:cNvSpPr>
           <p:nvPr>
-            <p:ph type="sldNum" idx="5" sz="quarter"/>
+            <p:ph type="sldNum" sz="quarter" idx="5"/>
           </p:nvPr>
         </p:nvSpPr>
         <p:spPr/>
@@ -982,7 +776,7 @@
 </file>
 
 <file path=ppt/notesSlides/notesSlide7.xml><?xml version="1.0" encoding="utf-8"?>
-<p:notes xmlns:a="http://schemas.openxmlformats.org/drawingml/2006/main" xmlns:p="http://schemas.openxmlformats.org/presentationml/2006/main" xmlns:r="http://schemas.openxmlformats.org/officeDocument/2006/relationships">
+<p:notes xmlns:a="http://schemas.openxmlformats.org/drawingml/2006/main" xmlns:r="http://schemas.openxmlformats.org/officeDocument/2006/relationships" xmlns:p="http://schemas.openxmlformats.org/presentationml/2006/main">
   <p:cSld>
     <p:spTree>
       <p:nvGrpSpPr>
@@ -1002,7 +796,7 @@
         <p:nvSpPr>
           <p:cNvPr id="2" name="Slide Image Placeholder 1"/>
           <p:cNvSpPr>
-            <a:spLocks noGrp="1"/>
+            <a:spLocks noGrp="1" noRot="1" noChangeAspect="1"/>
           </p:cNvSpPr>
           <p:nvPr>
             <p:ph type="sldImg" idx="2"/>
@@ -1017,7 +811,7 @@
             <a:spLocks noGrp="1"/>
           </p:cNvSpPr>
           <p:nvPr>
-            <p:ph type="body" idx="3" sz="quarter"/>
+            <p:ph type="body" sz="quarter" idx="3"/>
           </p:nvPr>
         </p:nvSpPr>
         <p:spPr/>
@@ -1043,7 +837,7 @@
             <a:spLocks noGrp="1"/>
           </p:cNvSpPr>
           <p:nvPr>
-            <p:ph type="sldNum" idx="5" sz="quarter"/>
+            <p:ph type="sldNum" sz="quarter" idx="5"/>
           </p:nvPr>
         </p:nvSpPr>
         <p:spPr/>
@@ -1057,7 +851,7 @@
 </file>
 
 <file path=ppt/notesSlides/notesSlide8.xml><?xml version="1.0" encoding="utf-8"?>
-<p:notes xmlns:a="http://schemas.openxmlformats.org/drawingml/2006/main" xmlns:p="http://schemas.openxmlformats.org/presentationml/2006/main" xmlns:r="http://schemas.openxmlformats.org/officeDocument/2006/relationships">
+<p:notes xmlns:a="http://schemas.openxmlformats.org/drawingml/2006/main" xmlns:r="http://schemas.openxmlformats.org/officeDocument/2006/relationships" xmlns:p="http://schemas.openxmlformats.org/presentationml/2006/main">
   <p:cSld>
     <p:spTree>
       <p:nvGrpSpPr>
@@ -1077,7 +871,7 @@
         <p:nvSpPr>
           <p:cNvPr id="2" name="Slide Image Placeholder 1"/>
           <p:cNvSpPr>
-            <a:spLocks noGrp="1"/>
+            <a:spLocks noGrp="1" noRot="1" noChangeAspect="1"/>
           </p:cNvSpPr>
           <p:nvPr>
             <p:ph type="sldImg" idx="2"/>
@@ -1092,7 +886,7 @@
             <a:spLocks noGrp="1"/>
           </p:cNvSpPr>
           <p:nvPr>
-            <p:ph type="body" idx="3" sz="quarter"/>
+            <p:ph type="body" sz="quarter" idx="3"/>
           </p:nvPr>
         </p:nvSpPr>
         <p:spPr/>
@@ -1118,7 +912,7 @@
             <a:spLocks noGrp="1"/>
           </p:cNvSpPr>
           <p:nvPr>
-            <p:ph type="sldNum" idx="5" sz="quarter"/>
+            <p:ph type="sldNum" sz="quarter" idx="5"/>
           </p:nvPr>
         </p:nvSpPr>
         <p:spPr/>
@@ -1132,7 +926,7 @@
 </file>
 
 <file path=ppt/notesSlides/notesSlide9.xml><?xml version="1.0" encoding="utf-8"?>
-<p:notes xmlns:a="http://schemas.openxmlformats.org/drawingml/2006/main" xmlns:p="http://schemas.openxmlformats.org/presentationml/2006/main" xmlns:r="http://schemas.openxmlformats.org/officeDocument/2006/relationships">
+<p:notes xmlns:a="http://schemas.openxmlformats.org/drawingml/2006/main" xmlns:r="http://schemas.openxmlformats.org/officeDocument/2006/relationships" xmlns:p="http://schemas.openxmlformats.org/presentationml/2006/main">
   <p:cSld>
     <p:spTree>
       <p:nvGrpSpPr>
@@ -1152,7 +946,7 @@
         <p:nvSpPr>
           <p:cNvPr id="2" name="Slide Image Placeholder 1"/>
           <p:cNvSpPr>
-            <a:spLocks noGrp="1"/>
+            <a:spLocks noGrp="1" noRot="1" noChangeAspect="1"/>
           </p:cNvSpPr>
           <p:nvPr>
             <p:ph type="sldImg" idx="2"/>
@@ -1167,7 +961,7 @@
             <a:spLocks noGrp="1"/>
           </p:cNvSpPr>
           <p:nvPr>
-            <p:ph type="body" idx="3" sz="quarter"/>
+            <p:ph type="body" sz="quarter" idx="3"/>
           </p:nvPr>
         </p:nvSpPr>
         <p:spPr/>
@@ -1193,7 +987,7 @@
             <a:spLocks noGrp="1"/>
           </p:cNvSpPr>
           <p:nvPr>
-            <p:ph type="sldNum" idx="5" sz="quarter"/>
+            <p:ph type="sldNum" sz="quarter" idx="5"/>
           </p:nvPr>
         </p:nvSpPr>
         <p:spPr/>
@@ -1244,10 +1038,9 @@
           <a:lstStyle/>
           <a:p>
             <a:r>
-              <a:rPr lang="en-US" smtClean="0"/>
+              <a:rPr lang="en-US"/>
               <a:t>Click to edit Master title style</a:t>
             </a:r>
-            <a:endParaRPr lang="en-US"/>
           </a:p>
         </p:txBody>
       </p:sp>
@@ -1363,10 +1156,9 @@
           </a:lstStyle>
           <a:p>
             <a:r>
-              <a:rPr lang="en-US" smtClean="0"/>
+              <a:rPr lang="en-US"/>
               <a:t>Click to edit Master subtitle style</a:t>
             </a:r>
-            <a:endParaRPr lang="en-US"/>
           </a:p>
         </p:txBody>
       </p:sp>
@@ -1387,7 +1179,7 @@
           <a:p>
             <a:fld id="{5BCAD085-E8A6-8845-BD4E-CB4CCA059FC4}" type="datetimeFigureOut">
               <a:rPr lang="en-US" smtClean="0"/>
-              <a:t>1/27/13</a:t>
+              <a:t>14-Oct-2026</a:t>
             </a:fld>
             <a:endParaRPr lang="en-US"/>
           </a:p>
@@ -1481,10 +1273,9 @@
           <a:lstStyle/>
           <a:p>
             <a:r>
-              <a:rPr lang="en-US" smtClean="0"/>
+              <a:rPr lang="en-US"/>
               <a:t>Click to edit Master title style</a:t>
             </a:r>
-            <a:endParaRPr lang="en-US"/>
           </a:p>
         </p:txBody>
       </p:sp>
@@ -1505,38 +1296,37 @@
           <a:p>
             <a:pPr lvl="0"/>
             <a:r>
-              <a:rPr lang="en-US" smtClean="0"/>
+              <a:rPr lang="en-US"/>
               <a:t>Click to edit Master text styles</a:t>
             </a:r>
           </a:p>
           <a:p>
             <a:pPr lvl="1"/>
             <a:r>
-              <a:rPr lang="en-US" smtClean="0"/>
+              <a:rPr lang="en-US"/>
               <a:t>Second level</a:t>
             </a:r>
           </a:p>
           <a:p>
             <a:pPr lvl="2"/>
             <a:r>
-              <a:rPr lang="en-US" smtClean="0"/>
+              <a:rPr lang="en-US"/>
               <a:t>Third level</a:t>
             </a:r>
           </a:p>
           <a:p>
             <a:pPr lvl="3"/>
             <a:r>
-              <a:rPr lang="en-US" smtClean="0"/>
+              <a:rPr lang="en-US"/>
               <a:t>Fourth level</a:t>
             </a:r>
           </a:p>
           <a:p>
             <a:pPr lvl="4"/>
             <a:r>
-              <a:rPr lang="en-US" smtClean="0"/>
+              <a:rPr lang="en-US"/>
               <a:t>Fifth level</a:t>
             </a:r>
-            <a:endParaRPr lang="en-US"/>
           </a:p>
         </p:txBody>
       </p:sp>
@@ -1557,7 +1347,7 @@
           <a:p>
             <a:fld id="{5BCAD085-E8A6-8845-BD4E-CB4CCA059FC4}" type="datetimeFigureOut">
               <a:rPr lang="en-US" smtClean="0"/>
-              <a:t>1/27/13</a:t>
+              <a:t>14-Oct-2026</a:t>
             </a:fld>
             <a:endParaRPr lang="en-US"/>
           </a:p>
@@ -1656,10 +1446,9 @@
           <a:lstStyle/>
           <a:p>
             <a:r>
-              <a:rPr lang="en-US" smtClean="0"/>
+              <a:rPr lang="en-US"/>
               <a:t>Click to edit Master title style</a:t>
             </a:r>
-            <a:endParaRPr lang="en-US"/>
           </a:p>
         </p:txBody>
       </p:sp>
@@ -1685,38 +1474,37 @@
           <a:p>
             <a:pPr lvl="0"/>
             <a:r>
-              <a:rPr lang="en-US" smtClean="0"/>
+              <a:rPr lang="en-US"/>
               <a:t>Click to edit Master text styles</a:t>
             </a:r>
           </a:p>
           <a:p>
             <a:pPr lvl="1"/>
             <a:r>
-              <a:rPr lang="en-US" smtClean="0"/>
+              <a:rPr lang="en-US"/>
               <a:t>Second level</a:t>
             </a:r>
           </a:p>
           <a:p>
             <a:pPr lvl="2"/>
             <a:r>
-              <a:rPr lang="en-US" smtClean="0"/>
+              <a:rPr lang="en-US"/>
               <a:t>Third level</a:t>
             </a:r>
           </a:p>
           <a:p>
             <a:pPr lvl="3"/>
             <a:r>
-              <a:rPr lang="en-US" smtClean="0"/>
+              <a:rPr lang="en-US"/>
               <a:t>Fourth level</a:t>
             </a:r>
           </a:p>
           <a:p>
             <a:pPr lvl="4"/>
             <a:r>
-              <a:rPr lang="en-US" smtClean="0"/>
+              <a:rPr lang="en-US"/>
               <a:t>Fifth level</a:t>
             </a:r>
-            <a:endParaRPr lang="en-US"/>
           </a:p>
         </p:txBody>
       </p:sp>
@@ -1737,7 +1525,7 @@
           <a:p>
             <a:fld id="{5BCAD085-E8A6-8845-BD4E-CB4CCA059FC4}" type="datetimeFigureOut">
               <a:rPr lang="en-US" smtClean="0"/>
-              <a:t>1/27/13</a:t>
+              <a:t>14-Oct-2026</a:t>
             </a:fld>
             <a:endParaRPr lang="en-US"/>
           </a:p>
@@ -1831,10 +1619,9 @@
           <a:lstStyle/>
           <a:p>
             <a:r>
-              <a:rPr lang="en-US" smtClean="0"/>
+              <a:rPr lang="en-US"/>
               <a:t>Click to edit Master title style</a:t>
             </a:r>
-            <a:endParaRPr lang="en-US"/>
           </a:p>
         </p:txBody>
       </p:sp>
@@ -1855,38 +1642,37 @@
           <a:p>
             <a:pPr lvl="0"/>
             <a:r>
-              <a:rPr lang="en-US" smtClean="0"/>
+              <a:rPr lang="en-US"/>
               <a:t>Click to edit Master text styles</a:t>
             </a:r>
           </a:p>
           <a:p>
             <a:pPr lvl="1"/>
             <a:r>
-              <a:rPr lang="en-US" smtClean="0"/>
+              <a:rPr lang="en-US"/>
               <a:t>Second level</a:t>
             </a:r>
           </a:p>
           <a:p>
             <a:pPr lvl="2"/>
             <a:r>
-              <a:rPr lang="en-US" smtClean="0"/>
+              <a:rPr lang="en-US"/>
               <a:t>Third level</a:t>
             </a:r>
           </a:p>
           <a:p>
             <a:pPr lvl="3"/>
             <a:r>
-              <a:rPr lang="en-US" smtClean="0"/>
+              <a:rPr lang="en-US"/>
               <a:t>Fourth level</a:t>
             </a:r>
           </a:p>
           <a:p>
             <a:pPr lvl="4"/>
             <a:r>
-              <a:rPr lang="en-US" smtClean="0"/>
+              <a:rPr lang="en-US"/>
               <a:t>Fifth level</a:t>
             </a:r>
-            <a:endParaRPr lang="en-US"/>
           </a:p>
         </p:txBody>
       </p:sp>
@@ -1907,7 +1693,7 @@
           <a:p>
             <a:fld id="{5BCAD085-E8A6-8845-BD4E-CB4CCA059FC4}" type="datetimeFigureOut">
               <a:rPr lang="en-US" smtClean="0"/>
-              <a:t>1/27/13</a:t>
+              <a:t>14-Oct-2026</a:t>
             </a:fld>
             <a:endParaRPr lang="en-US"/>
           </a:p>
@@ -2010,10 +1796,9 @@
           </a:lstStyle>
           <a:p>
             <a:r>
-              <a:rPr lang="en-US" smtClean="0"/>
+              <a:rPr lang="en-US"/>
               <a:t>Click to edit Master title style</a:t>
             </a:r>
-            <a:endParaRPr lang="en-US"/>
           </a:p>
         </p:txBody>
       </p:sp>
@@ -2130,7 +1915,7 @@
           <a:p>
             <a:pPr lvl="0"/>
             <a:r>
-              <a:rPr lang="en-US" smtClean="0"/>
+              <a:rPr lang="en-US"/>
               <a:t>Click to edit Master text styles</a:t>
             </a:r>
           </a:p>
@@ -2153,7 +1938,7 @@
           <a:p>
             <a:fld id="{5BCAD085-E8A6-8845-BD4E-CB4CCA059FC4}" type="datetimeFigureOut">
               <a:rPr lang="en-US" smtClean="0"/>
-              <a:t>1/27/13</a:t>
+              <a:t>14-Oct-2026</a:t>
             </a:fld>
             <a:endParaRPr lang="en-US"/>
           </a:p>
@@ -2247,10 +2032,9 @@
           <a:lstStyle/>
           <a:p>
             <a:r>
-              <a:rPr lang="en-US" smtClean="0"/>
+              <a:rPr lang="en-US"/>
               <a:t>Click to edit Master title style</a:t>
             </a:r>
-            <a:endParaRPr lang="en-US"/>
           </a:p>
         </p:txBody>
       </p:sp>
@@ -2304,38 +2088,37 @@
           <a:p>
             <a:pPr lvl="0"/>
             <a:r>
-              <a:rPr lang="en-US" smtClean="0"/>
+              <a:rPr lang="en-US"/>
               <a:t>Click to edit Master text styles</a:t>
             </a:r>
           </a:p>
           <a:p>
             <a:pPr lvl="1"/>
             <a:r>
-              <a:rPr lang="en-US" smtClean="0"/>
+              <a:rPr lang="en-US"/>
               <a:t>Second level</a:t>
             </a:r>
           </a:p>
           <a:p>
             <a:pPr lvl="2"/>
             <a:r>
-              <a:rPr lang="en-US" smtClean="0"/>
+              <a:rPr lang="en-US"/>
               <a:t>Third level</a:t>
             </a:r>
           </a:p>
           <a:p>
             <a:pPr lvl="3"/>
             <a:r>
-              <a:rPr lang="en-US" smtClean="0"/>
+              <a:rPr lang="en-US"/>
               <a:t>Fourth level</a:t>
             </a:r>
           </a:p>
           <a:p>
             <a:pPr lvl="4"/>
             <a:r>
-              <a:rPr lang="en-US" smtClean="0"/>
+              <a:rPr lang="en-US"/>
               <a:t>Fifth level</a:t>
             </a:r>
-            <a:endParaRPr lang="en-US"/>
           </a:p>
         </p:txBody>
       </p:sp>
@@ -2389,38 +2172,37 @@
           <a:p>
             <a:pPr lvl="0"/>
             <a:r>
-              <a:rPr lang="en-US" smtClean="0"/>
+              <a:rPr lang="en-US"/>
               <a:t>Click to edit Master text styles</a:t>
             </a:r>
           </a:p>
           <a:p>
             <a:pPr lvl="1"/>
             <a:r>
-              <a:rPr lang="en-US" smtClean="0"/>
+              <a:rPr lang="en-US"/>
               <a:t>Second level</a:t>
             </a:r>
           </a:p>
           <a:p>
             <a:pPr lvl="2"/>
             <a:r>
-              <a:rPr lang="en-US" smtClean="0"/>
+              <a:rPr lang="en-US"/>
               <a:t>Third level</a:t>
             </a:r>
           </a:p>
           <a:p>
             <a:pPr lvl="3"/>
             <a:r>
-              <a:rPr lang="en-US" smtClean="0"/>
+              <a:rPr lang="en-US"/>
               <a:t>Fourth level</a:t>
             </a:r>
           </a:p>
           <a:p>
             <a:pPr lvl="4"/>
             <a:r>
-              <a:rPr lang="en-US" smtClean="0"/>
+              <a:rPr lang="en-US"/>
               <a:t>Fifth level</a:t>
             </a:r>
-            <a:endParaRPr lang="en-US"/>
           </a:p>
         </p:txBody>
       </p:sp>
@@ -2441,7 +2223,7 @@
           <a:p>
             <a:fld id="{5BCAD085-E8A6-8845-BD4E-CB4CCA059FC4}" type="datetimeFigureOut">
               <a:rPr lang="en-US" smtClean="0"/>
-              <a:t>1/27/13</a:t>
+              <a:t>14-Oct-2026</a:t>
             </a:fld>
             <a:endParaRPr lang="en-US"/>
           </a:p>
@@ -2539,10 +2321,9 @@
           </a:lstStyle>
           <a:p>
             <a:r>
-              <a:rPr lang="en-US" smtClean="0"/>
+              <a:rPr lang="en-US"/>
               <a:t>Click to edit Master title style</a:t>
             </a:r>
-            <a:endParaRPr lang="en-US"/>
           </a:p>
         </p:txBody>
       </p:sp>
@@ -2605,7 +2386,7 @@
           <a:p>
             <a:pPr lvl="0"/>
             <a:r>
-              <a:rPr lang="en-US" smtClean="0"/>
+              <a:rPr lang="en-US"/>
               <a:t>Click to edit Master text styles</a:t>
             </a:r>
           </a:p>
@@ -2661,38 +2442,37 @@
           <a:p>
             <a:pPr lvl="0"/>
             <a:r>
-              <a:rPr lang="en-US" smtClean="0"/>
+              <a:rPr lang="en-US"/>
               <a:t>Click to edit Master text styles</a:t>
             </a:r>
           </a:p>
           <a:p>
             <a:pPr lvl="1"/>
             <a:r>
-              <a:rPr lang="en-US" smtClean="0"/>
+              <a:rPr lang="en-US"/>
               <a:t>Second level</a:t>
             </a:r>
           </a:p>
           <a:p>
             <a:pPr lvl="2"/>
             <a:r>
-              <a:rPr lang="en-US" smtClean="0"/>
+              <a:rPr lang="en-US"/>
               <a:t>Third level</a:t>
             </a:r>
           </a:p>
           <a:p>
             <a:pPr lvl="3"/>
             <a:r>
-              <a:rPr lang="en-US" smtClean="0"/>
+              <a:rPr lang="en-US"/>
               <a:t>Fourth level</a:t>
             </a:r>
           </a:p>
           <a:p>
             <a:pPr lvl="4"/>
             <a:r>
-              <a:rPr lang="en-US" smtClean="0"/>
+              <a:rPr lang="en-US"/>
               <a:t>Fifth level</a:t>
             </a:r>
-            <a:endParaRPr lang="en-US"/>
           </a:p>
         </p:txBody>
       </p:sp>
@@ -2755,7 +2535,7 @@
           <a:p>
             <a:pPr lvl="0"/>
             <a:r>
-              <a:rPr lang="en-US" smtClean="0"/>
+              <a:rPr lang="en-US"/>
               <a:t>Click to edit Master text styles</a:t>
             </a:r>
           </a:p>
@@ -2811,38 +2591,37 @@
           <a:p>
             <a:pPr lvl="0"/>
             <a:r>
-              <a:rPr lang="en-US" smtClean="0"/>
+              <a:rPr lang="en-US"/>
               <a:t>Click to edit Master text styles</a:t>
             </a:r>
           </a:p>
           <a:p>
             <a:pPr lvl="1"/>
             <a:r>
-              <a:rPr lang="en-US" smtClean="0"/>
+              <a:rPr lang="en-US"/>
               <a:t>Second level</a:t>
             </a:r>
           </a:p>
           <a:p>
             <a:pPr lvl="2"/>
             <a:r>
-              <a:rPr lang="en-US" smtClean="0"/>
+              <a:rPr lang="en-US"/>
               <a:t>Third level</a:t>
             </a:r>
           </a:p>
           <a:p>
             <a:pPr lvl="3"/>
             <a:r>
-              <a:rPr lang="en-US" smtClean="0"/>
+              <a:rPr lang="en-US"/>
               <a:t>Fourth level</a:t>
             </a:r>
           </a:p>
           <a:p>
             <a:pPr lvl="4"/>
             <a:r>
-              <a:rPr lang="en-US" smtClean="0"/>
+              <a:rPr lang="en-US"/>
               <a:t>Fifth level</a:t>
             </a:r>
-            <a:endParaRPr lang="en-US"/>
           </a:p>
         </p:txBody>
       </p:sp>
@@ -2863,7 +2642,7 @@
           <a:p>
             <a:fld id="{5BCAD085-E8A6-8845-BD4E-CB4CCA059FC4}" type="datetimeFigureOut">
               <a:rPr lang="en-US" smtClean="0"/>
-              <a:t>1/27/13</a:t>
+              <a:t>14-Oct-2026</a:t>
             </a:fld>
             <a:endParaRPr lang="en-US"/>
           </a:p>
@@ -2957,10 +2736,9 @@
           <a:lstStyle/>
           <a:p>
             <a:r>
-              <a:rPr lang="en-US" smtClean="0"/>
+              <a:rPr lang="en-US"/>
               <a:t>Click to edit Master title style</a:t>
             </a:r>
-            <a:endParaRPr lang="en-US"/>
           </a:p>
         </p:txBody>
       </p:sp>
@@ -2981,7 +2759,7 @@
           <a:p>
             <a:fld id="{5BCAD085-E8A6-8845-BD4E-CB4CCA059FC4}" type="datetimeFigureOut">
               <a:rPr lang="en-US" smtClean="0"/>
-              <a:t>1/27/13</a:t>
+              <a:t>14-Oct-2026</a:t>
             </a:fld>
             <a:endParaRPr lang="en-US"/>
           </a:p>
@@ -3076,7 +2854,7 @@
           <a:p>
             <a:fld id="{5BCAD085-E8A6-8845-BD4E-CB4CCA059FC4}" type="datetimeFigureOut">
               <a:rPr lang="en-US" smtClean="0"/>
-              <a:t>1/27/13</a:t>
+              <a:t>14-Oct-2026</a:t>
             </a:fld>
             <a:endParaRPr lang="en-US"/>
           </a:p>
@@ -3179,10 +2957,9 @@
           </a:lstStyle>
           <a:p>
             <a:r>
-              <a:rPr lang="en-US" smtClean="0"/>
+              <a:rPr lang="en-US"/>
               <a:t>Click to edit Master title style</a:t>
             </a:r>
-            <a:endParaRPr lang="en-US"/>
           </a:p>
         </p:txBody>
       </p:sp>
@@ -3236,38 +3013,37 @@
           <a:p>
             <a:pPr lvl="0"/>
             <a:r>
-              <a:rPr lang="en-US" smtClean="0"/>
+              <a:rPr lang="en-US"/>
               <a:t>Click to edit Master text styles</a:t>
             </a:r>
           </a:p>
           <a:p>
             <a:pPr lvl="1"/>
             <a:r>
-              <a:rPr lang="en-US" smtClean="0"/>
+              <a:rPr lang="en-US"/>
               <a:t>Second level</a:t>
             </a:r>
           </a:p>
           <a:p>
             <a:pPr lvl="2"/>
             <a:r>
-              <a:rPr lang="en-US" smtClean="0"/>
+              <a:rPr lang="en-US"/>
               <a:t>Third level</a:t>
             </a:r>
           </a:p>
           <a:p>
             <a:pPr lvl="3"/>
             <a:r>
-              <a:rPr lang="en-US" smtClean="0"/>
+              <a:rPr lang="en-US"/>
               <a:t>Fourth level</a:t>
             </a:r>
           </a:p>
           <a:p>
             <a:pPr lvl="4"/>
             <a:r>
-              <a:rPr lang="en-US" smtClean="0"/>
+              <a:rPr lang="en-US"/>
               <a:t>Fifth level</a:t>
             </a:r>
-            <a:endParaRPr lang="en-US"/>
           </a:p>
         </p:txBody>
       </p:sp>
@@ -3330,7 +3106,7 @@
           <a:p>
             <a:pPr lvl="0"/>
             <a:r>
-              <a:rPr lang="en-US" smtClean="0"/>
+              <a:rPr lang="en-US"/>
               <a:t>Click to edit Master text styles</a:t>
             </a:r>
           </a:p>
@@ -3353,7 +3129,7 @@
           <a:p>
             <a:fld id="{5BCAD085-E8A6-8845-BD4E-CB4CCA059FC4}" type="datetimeFigureOut">
               <a:rPr lang="en-US" smtClean="0"/>
-              <a:t>1/27/13</a:t>
+              <a:t>14-Oct-2026</a:t>
             </a:fld>
             <a:endParaRPr lang="en-US"/>
           </a:p>
@@ -3456,10 +3232,9 @@
           </a:lstStyle>
           <a:p>
             <a:r>
-              <a:rPr lang="en-US" smtClean="0"/>
+              <a:rPr lang="en-US"/>
               <a:t>Click to edit Master title style</a:t>
             </a:r>
-            <a:endParaRPr lang="en-US"/>
           </a:p>
         </p:txBody>
       </p:sp>
@@ -3583,7 +3358,7 @@
           <a:p>
             <a:pPr lvl="0"/>
             <a:r>
-              <a:rPr lang="en-US" smtClean="0"/>
+              <a:rPr lang="en-US"/>
               <a:t>Click to edit Master text styles</a:t>
             </a:r>
           </a:p>
@@ -3606,7 +3381,7 @@
           <a:p>
             <a:fld id="{5BCAD085-E8A6-8845-BD4E-CB4CCA059FC4}" type="datetimeFigureOut">
               <a:rPr lang="en-US" smtClean="0"/>
-              <a:t>1/27/13</a:t>
+              <a:t>14-Oct-2026</a:t>
             </a:fld>
             <a:endParaRPr lang="en-US"/>
           </a:p>
@@ -3715,10 +3490,9 @@
           <a:lstStyle/>
           <a:p>
             <a:r>
-              <a:rPr lang="en-US" smtClean="0"/>
+              <a:rPr lang="en-US"/>
               <a:t>Click to edit Master title style</a:t>
             </a:r>
-            <a:endParaRPr lang="en-US"/>
           </a:p>
         </p:txBody>
       </p:sp>
@@ -3749,38 +3523,37 @@
           <a:p>
             <a:pPr lvl="0"/>
             <a:r>
-              <a:rPr lang="en-US" smtClean="0"/>
+              <a:rPr lang="en-US"/>
               <a:t>Click to edit Master text styles</a:t>
             </a:r>
           </a:p>
           <a:p>
             <a:pPr lvl="1"/>
             <a:r>
-              <a:rPr lang="en-US" smtClean="0"/>
+              <a:rPr lang="en-US"/>
               <a:t>Second level</a:t>
             </a:r>
           </a:p>
           <a:p>
             <a:pPr lvl="2"/>
             <a:r>
-              <a:rPr lang="en-US" smtClean="0"/>
+              <a:rPr lang="en-US"/>
               <a:t>Third level</a:t>
             </a:r>
           </a:p>
           <a:p>
             <a:pPr lvl="3"/>
             <a:r>
-              <a:rPr lang="en-US" smtClean="0"/>
+              <a:rPr lang="en-US"/>
               <a:t>Fourth level</a:t>
             </a:r>
           </a:p>
           <a:p>
             <a:pPr lvl="4"/>
             <a:r>
-              <a:rPr lang="en-US" smtClean="0"/>
+              <a:rPr lang="en-US"/>
               <a:t>Fifth level</a:t>
             </a:r>
-            <a:endParaRPr lang="en-US"/>
           </a:p>
         </p:txBody>
       </p:sp>
@@ -3819,7 +3592,7 @@
           <a:p>
             <a:fld id="{5BCAD085-E8A6-8845-BD4E-CB4CCA059FC4}" type="datetimeFigureOut">
               <a:rPr lang="en-US" smtClean="0"/>
-              <a:t>1/27/13</a:t>
+              <a:t>14-Oct-2026</a:t>
             </a:fld>
             <a:endParaRPr lang="en-US"/>
           </a:p>
@@ -4178,7 +3951,7 @@
 </file>
 
 <file path=ppt/slides/slide1.xml><?xml version="1.0" encoding="utf-8"?>
-<p:sld xmlns:a="http://schemas.openxmlformats.org/drawingml/2006/main" xmlns:p="http://schemas.openxmlformats.org/presentationml/2006/main" xmlns:r="http://schemas.openxmlformats.org/officeDocument/2006/relationships">
+<p:sld xmlns:a="http://schemas.openxmlformats.org/drawingml/2006/main" xmlns:r="http://schemas.openxmlformats.org/officeDocument/2006/relationships" xmlns:p="http://schemas.openxmlformats.org/presentationml/2006/main">
   <p:cSld>
     <p:spTree>
       <p:nvGrpSpPr>
@@ -4186,7 +3959,14 @@
         <p:cNvGrpSpPr/>
         <p:nvPr/>
       </p:nvGrpSpPr>
-      <p:grpSpPr/>
+      <p:grpSpPr>
+        <a:xfrm>
+          <a:off x="0" y="0"/>
+          <a:ext cx="0" cy="0"/>
+          <a:chOff x="0" y="0"/>
+          <a:chExt cx="0" cy="0"/>
+        </a:xfrm>
+      </p:grpSpPr>
       <p:sp>
         <p:nvSpPr>
           <p:cNvPr id="2" name="Rectangle 1"/>
@@ -4227,6 +4007,7 @@
           <a:lstStyle/>
           <a:p>
             <a:pPr algn="ctr"/>
+            <a:endParaRPr/>
           </a:p>
         </p:txBody>
       </p:sp>
@@ -4239,7 +4020,7 @@
         <p:spPr>
           <a:xfrm>
             <a:off x="457200" y="164592"/>
-            <a:ext cx="11247120" cy="731520"/>
+            <a:ext cx="11247120" cy="584775"/>
           </a:xfrm>
           <a:prstGeom prst="rect">
             <a:avLst/>
@@ -4258,27 +4039,42 @@
               </a:spcAft>
             </a:pPr>
             <a:r>
-              <a:rPr sz="3200" b="1">
+              <a:rPr sz="3200" b="1" dirty="0">
                 <a:solidFill>
                   <a:srgbClr val="FFFFFF"/>
                 </a:solidFill>
                 <a:latin typeface="Calibri"/>
               </a:rPr>
-              <a:t>Strassen's Algorithm: beating n³</a:t>
-            </a:r>
-          </a:p>
-        </p:txBody>
-      </p:sp>
-      <p:sp>
-        <p:nvSpPr>
-          <p:cNvPr id="4" name="TextBox 3"/>
+              <a:t>Strassen's Algorith</a:t>
+            </a:r>
+            <a:r>
+              <a:rPr lang="en-US" sz="3200" b="1" dirty="0">
+                <a:solidFill>
+                  <a:srgbClr val="FFFFFF"/>
+                </a:solidFill>
+                <a:latin typeface="Calibri"/>
+              </a:rPr>
+              <a:t>m</a:t>
+            </a:r>
+            <a:endParaRPr sz="3200" b="1" dirty="0">
+              <a:solidFill>
+                <a:srgbClr val="FFFFFF"/>
+              </a:solidFill>
+              <a:latin typeface="Calibri"/>
+            </a:endParaRPr>
+          </a:p>
+        </p:txBody>
+      </p:sp>
+      <p:sp>
+        <p:nvSpPr>
+          <p:cNvPr id="5" name="TextBox 4"/>
           <p:cNvSpPr txBox="1"/>
           <p:nvPr/>
         </p:nvSpPr>
         <p:spPr>
           <a:xfrm>
-            <a:off x="9418320" y="6446520"/>
-            <a:ext cx="2743200" cy="320040"/>
+            <a:off x="548640" y="1645920"/>
+            <a:ext cx="5943600" cy="1497846"/>
           </a:xfrm>
           <a:prstGeom prst="rect">
             <a:avLst/>
@@ -4291,52 +4087,22 @@
           </a:bodyPr>
           <a:lstStyle/>
           <a:p>
-            <a:pPr algn="r">
-              <a:spcAft>
-                <a:spcPts val="800"/>
-              </a:spcAft>
-            </a:pPr>
-            <a:r>
-              <a:rPr sz="1100" b="0">
-                <a:solidFill>
-                  <a:srgbClr val="555555"/>
-                </a:solidFill>
-                <a:latin typeface="Calibri"/>
-              </a:rPr>
-              <a:t>Segment 1 - Problem</a:t>
-            </a:r>
-          </a:p>
-        </p:txBody>
-      </p:sp>
-      <p:sp>
-        <p:nvSpPr>
-          <p:cNvPr id="5" name="TextBox 4"/>
-          <p:cNvSpPr txBox="1"/>
-          <p:nvPr/>
-        </p:nvSpPr>
-        <p:spPr>
-          <a:xfrm>
-            <a:off x="548640" y="1645920"/>
-            <a:ext cx="5943600" cy="3200400"/>
-          </a:xfrm>
-          <a:prstGeom prst="rect">
-            <a:avLst/>
-          </a:prstGeom>
-          <a:noFill/>
-        </p:spPr>
-        <p:txBody>
-          <a:bodyPr wrap="square">
-            <a:spAutoFit/>
-          </a:bodyPr>
-          <a:lstStyle/>
-          <a:p>
             <a:pPr algn="l">
               <a:spcAft>
                 <a:spcPts val="800"/>
               </a:spcAft>
             </a:pPr>
             <a:r>
-              <a:rPr sz="2600" b="0">
+              <a:rPr lang="en-US" sz="2600" b="0" dirty="0">
+                <a:solidFill>
+                  <a:srgbClr val="1B2A49"/>
+                </a:solidFill>
+                <a:latin typeface="Calibri"/>
+              </a:rPr>
+              <a:t>- </a:t>
+            </a:r>
+            <a:r>
+              <a:rPr sz="2600" b="0" dirty="0">
                 <a:solidFill>
                   <a:srgbClr val="1B2A49"/>
                 </a:solidFill>
@@ -4352,7 +4118,16 @@
               </a:spcAft>
             </a:pPr>
             <a:r>
-              <a:rPr sz="2600" b="0">
+              <a:rPr lang="en-US" sz="2600" b="0" dirty="0">
+                <a:solidFill>
+                  <a:srgbClr val="1B2A49"/>
+                </a:solidFill>
+                <a:latin typeface="Calibri"/>
+              </a:rPr>
+              <a:t>- </a:t>
+            </a:r>
+            <a:r>
+              <a:rPr sz="2600" b="0" dirty="0">
                 <a:solidFill>
                   <a:srgbClr val="1B2A49"/>
                 </a:solidFill>
@@ -4368,30 +4143,38 @@
               </a:spcAft>
             </a:pPr>
             <a:r>
-              <a:rPr sz="2600" b="0">
+              <a:rPr lang="en-US" sz="2600" dirty="0">
                 <a:solidFill>
                   <a:srgbClr val="1B2A49"/>
                 </a:solidFill>
                 <a:latin typeface="Calibri"/>
               </a:rPr>
-              <a:t>“Gaussian elimination is not optimal”</a:t>
-            </a:r>
-          </a:p>
-          <a:p>
-            <a:pPr algn="l">
-              <a:spcAft>
-                <a:spcPts val="800"/>
-              </a:spcAft>
-            </a:pPr>
-            <a:r>
-              <a:rPr sz="2600" b="0">
+              <a:t>- "</a:t>
+            </a:r>
+            <a:r>
+              <a:rPr sz="2600" b="0" dirty="0">
                 <a:solidFill>
                   <a:srgbClr val="1B2A49"/>
                 </a:solidFill>
                 <a:latin typeface="Calibri"/>
               </a:rPr>
-              <a:t>Numerische Mathematik 13, 354-356</a:t>
-            </a:r>
+              <a:t>Gaussian elimination is not optimal</a:t>
+            </a:r>
+            <a:r>
+              <a:rPr lang="en-US" sz="2600" b="0" dirty="0">
+                <a:solidFill>
+                  <a:srgbClr val="1B2A49"/>
+                </a:solidFill>
+                <a:latin typeface="Calibri"/>
+              </a:rPr>
+              <a:t>"</a:t>
+            </a:r>
+            <a:endParaRPr sz="2600" b="0" dirty="0">
+              <a:solidFill>
+                <a:srgbClr val="1B2A49"/>
+              </a:solidFill>
+              <a:latin typeface="Calibri"/>
+            </a:endParaRPr>
           </a:p>
         </p:txBody>
       </p:sp>
@@ -4428,7 +4211,7 @@
         <p:spPr>
           <a:xfrm>
             <a:off x="6675120" y="6172200"/>
-            <a:ext cx="5029200" cy="457200"/>
+            <a:ext cx="5029200" cy="261610"/>
           </a:xfrm>
           <a:prstGeom prst="rect">
             <a:avLst/>
@@ -4447,13 +4230,13 @@
               </a:spcAft>
             </a:pPr>
             <a:r>
-              <a:rPr sz="1100" b="0">
+              <a:rPr sz="1100" b="0" dirty="0">
                 <a:solidFill>
                   <a:srgbClr val="555555"/>
                 </a:solidFill>
                 <a:latin typeface="Calibri"/>
               </a:rPr>
-              <a:t>Volker Strassen, Knuth Prize lecture. Photo: David Eppstein, CC BY-SA 3.0</a:t>
+              <a:t>Volker Strassen</a:t>
             </a:r>
           </a:p>
         </p:txBody>
@@ -4467,7 +4250,7 @@
 </file>
 
 <file path=ppt/slides/slide10.xml><?xml version="1.0" encoding="utf-8"?>
-<p:sld xmlns:a="http://schemas.openxmlformats.org/drawingml/2006/main" xmlns:p="http://schemas.openxmlformats.org/presentationml/2006/main" xmlns:r="http://schemas.openxmlformats.org/officeDocument/2006/relationships">
+<p:sld xmlns:a="http://schemas.openxmlformats.org/drawingml/2006/main" xmlns:r="http://schemas.openxmlformats.org/officeDocument/2006/relationships" xmlns:p="http://schemas.openxmlformats.org/presentationml/2006/main">
   <p:cSld>
     <p:spTree>
       <p:nvGrpSpPr>
@@ -4475,7 +4258,14 @@
         <p:cNvGrpSpPr/>
         <p:nvPr/>
       </p:nvGrpSpPr>
-      <p:grpSpPr/>
+      <p:grpSpPr>
+        <a:xfrm>
+          <a:off x="0" y="0"/>
+          <a:ext cx="0" cy="0"/>
+          <a:chOff x="0" y="0"/>
+          <a:chExt cx="0" cy="0"/>
+        </a:xfrm>
+      </p:grpSpPr>
       <p:sp>
         <p:nvSpPr>
           <p:cNvPr id="2" name="Rectangle 1"/>
@@ -4516,6 +4306,7 @@
           <a:lstStyle/>
           <a:p>
             <a:pPr algn="ctr"/>
+            <a:endParaRPr/>
           </a:p>
         </p:txBody>
       </p:sp>
@@ -4560,14 +4351,14 @@
       </p:sp>
       <p:sp>
         <p:nvSpPr>
-          <p:cNvPr id="4" name="TextBox 3"/>
+          <p:cNvPr id="5" name="TextBox 4"/>
           <p:cNvSpPr txBox="1"/>
           <p:nvPr/>
         </p:nvSpPr>
         <p:spPr>
           <a:xfrm>
-            <a:off x="9418320" y="6446520"/>
-            <a:ext cx="2743200" cy="320040"/>
+            <a:off x="457200" y="1188720"/>
+            <a:ext cx="11338560" cy="5355312"/>
           </a:xfrm>
           <a:prstGeom prst="rect">
             <a:avLst/>
@@ -4580,250 +4371,201 @@
           </a:bodyPr>
           <a:lstStyle/>
           <a:p>
-            <a:pPr algn="r">
-              <a:spcAft>
-                <a:spcPts val="800"/>
-              </a:spcAft>
-            </a:pPr>
-            <a:r>
-              <a:rPr sz="1100" b="0">
-                <a:solidFill>
-                  <a:srgbClr val="555555"/>
-                </a:solidFill>
-                <a:latin typeface="Calibri"/>
-              </a:rPr>
-              <a:t>Segment 7 - Outro</a:t>
-            </a:r>
-          </a:p>
-        </p:txBody>
-      </p:sp>
-      <p:sp>
-        <p:nvSpPr>
-          <p:cNvPr id="5" name="TextBox 4"/>
-          <p:cNvSpPr txBox="1"/>
-          <p:nvPr/>
-        </p:nvSpPr>
-        <p:spPr>
-          <a:xfrm>
-            <a:off x="457200" y="1188720"/>
-            <a:ext cx="11338560" cy="5394960"/>
-          </a:xfrm>
-          <a:prstGeom prst="rect">
-            <a:avLst/>
-          </a:prstGeom>
-          <a:noFill/>
-        </p:spPr>
-        <p:txBody>
-          <a:bodyPr wrap="square">
-            <a:spAutoFit/>
-          </a:bodyPr>
-          <a:lstStyle/>
-          <a:p>
-            <a:pPr algn="l">
-              <a:spcAft>
-                <a:spcPts val="800"/>
-              </a:spcAft>
-            </a:pPr>
-            <a:r>
-              <a:rPr sz="1500" b="0">
-                <a:solidFill>
-                  <a:srgbClr val="1B2A49"/>
-                </a:solidFill>
-                <a:latin typeface="Calibri"/>
-              </a:rPr>
-              <a:t>VIDEOS</a:t>
-            </a:r>
-          </a:p>
-          <a:p>
-            <a:pPr algn="l">
-              <a:spcAft>
-                <a:spcPts val="800"/>
-              </a:spcAft>
-            </a:pPr>
-            <a:r>
-              <a:rPr sz="1500" b="0">
-                <a:solidFill>
-                  <a:srgbClr val="1B2A49"/>
-                </a:solidFill>
-                <a:latin typeface="Calibri"/>
-              </a:rPr>
-              <a:t>• ByteQuest, 'Strassen Algorithm Visually Explained' - youtube.com/watch?v=2IgZuVGwEb0</a:t>
-            </a:r>
-          </a:p>
-          <a:p>
-            <a:pPr algn="l">
-              <a:spcAft>
-                <a:spcPts val="800"/>
-              </a:spcAft>
-            </a:pPr>
-            <a:r>
-              <a:rPr sz="1500" b="0">
-                <a:solidFill>
-                  <a:srgbClr val="1B2A49"/>
-                </a:solidFill>
-                <a:latin typeface="Calibri"/>
-              </a:rPr>
-              <a:t>• Sagar Choudhary, 'Strassen's Matrix Multiplication | Faster Matrix Multiplication Explained with Example' - youtube.com/watch?v=cGmfchtOJi4</a:t>
-            </a:r>
-          </a:p>
-          <a:p>
-            <a:pPr algn="l">
-              <a:spcAft>
-                <a:spcPts val="800"/>
-              </a:spcAft>
-            </a:pPr>
-            <a:r>
-              <a:rPr sz="1500" b="0">
-                <a:solidFill>
-                  <a:srgbClr val="1B2A49"/>
-                </a:solidFill>
-                <a:latin typeface="Calibri"/>
-              </a:rPr>
-              <a:t>ARTICLES</a:t>
-            </a:r>
-          </a:p>
-          <a:p>
-            <a:pPr algn="l">
-              <a:spcAft>
-                <a:spcPts val="800"/>
-              </a:spcAft>
-            </a:pPr>
-            <a:r>
-              <a:rPr sz="1500" b="0">
-                <a:solidFill>
-                  <a:srgbClr val="1B2A49"/>
-                </a:solidFill>
-                <a:latin typeface="Calibri"/>
-              </a:rPr>
-              <a:t>• Wikipedia, 'Strassen algorithm' - en.wikipedia.org/wiki/Strassen_algorithm</a:t>
-            </a:r>
-          </a:p>
-          <a:p>
-            <a:pPr algn="l">
-              <a:spcAft>
-                <a:spcPts val="800"/>
-              </a:spcAft>
-            </a:pPr>
-            <a:r>
-              <a:rPr sz="1500" b="0">
-                <a:solidFill>
-                  <a:srgbClr val="1B2A49"/>
-                </a:solidFill>
-                <a:latin typeface="Calibri"/>
-              </a:rPr>
-              <a:t>• Wikipedia, 'Computational complexity of matrix multiplication' - en.wikipedia.org/wiki/Computational_complexity_of_matrix_multiplication</a:t>
-            </a:r>
-          </a:p>
-          <a:p>
-            <a:pPr algn="l">
-              <a:spcAft>
-                <a:spcPts val="800"/>
-              </a:spcAft>
-            </a:pPr>
-            <a:r>
-              <a:rPr sz="1500" b="0">
-                <a:solidFill>
-                  <a:srgbClr val="1B2A49"/>
-                </a:solidFill>
-                <a:latin typeface="Calibri"/>
-              </a:rPr>
-              <a:t>• GeeksforGeeks, 'Matrix Multiplication / Strassen's' - geeksforgeeks.org/strassens-matrix-multiplication/</a:t>
-            </a:r>
-          </a:p>
-          <a:p>
-            <a:pPr algn="l">
-              <a:spcAft>
-                <a:spcPts val="800"/>
-              </a:spcAft>
-            </a:pPr>
-            <a:r>
-              <a:rPr sz="1500" b="0">
-                <a:solidFill>
-                  <a:srgbClr val="1B2A49"/>
-                </a:solidFill>
-                <a:latin typeface="Calibri"/>
-              </a:rPr>
-              <a:t>RESEARCH</a:t>
-            </a:r>
-          </a:p>
-          <a:p>
-            <a:pPr algn="l">
-              <a:spcAft>
-                <a:spcPts val="800"/>
-              </a:spcAft>
-            </a:pPr>
-            <a:r>
-              <a:rPr sz="1500" b="0">
-                <a:solidFill>
-                  <a:srgbClr val="1B2A49"/>
-                </a:solidFill>
-                <a:latin typeface="Calibri"/>
-              </a:rPr>
-              <a:t>• Strassen (1969), Numerische Mathematik 13:354-356</a:t>
-            </a:r>
-          </a:p>
-          <a:p>
-            <a:pPr algn="l">
-              <a:spcAft>
-                <a:spcPts val="800"/>
-              </a:spcAft>
-            </a:pPr>
-            <a:r>
-              <a:rPr sz="1500" b="0">
-                <a:solidFill>
-                  <a:srgbClr val="1B2A49"/>
-                </a:solidFill>
-                <a:latin typeface="Calibri"/>
-              </a:rPr>
-              <a:t>• Demmel, Dumitriu, Holtz, Kleinberg, 'Fast matrix multiplication is stable' - arxiv.org/abs/math/0603207</a:t>
-            </a:r>
-          </a:p>
-          <a:p>
-            <a:pPr algn="l">
-              <a:spcAft>
-                <a:spcPts val="800"/>
-              </a:spcAft>
-            </a:pPr>
-            <a:r>
-              <a:rPr sz="1500" b="0">
-                <a:solidFill>
-                  <a:srgbClr val="1B2A49"/>
-                </a:solidFill>
-                <a:latin typeface="Calibri"/>
-              </a:rPr>
-              <a:t>• Fawzi et al., AlphaTensor, Nature 610 (2022) - nature.com/articles/s41586-022-05172-4</a:t>
-            </a:r>
-          </a:p>
-          <a:p>
-            <a:pPr algn="l">
-              <a:spcAft>
-                <a:spcPts val="800"/>
-              </a:spcAft>
-            </a:pPr>
-            <a:r>
-              <a:rPr sz="1500" b="0">
-                <a:solidFill>
-                  <a:srgbClr val="1B2A49"/>
-                </a:solidFill>
-                <a:latin typeface="Calibri"/>
-              </a:rPr>
-              <a:t>• Alman et al., 'More Asymmetry Yields Faster Matrix Multiplication' - arxiv.org/abs/2404.16349</a:t>
-            </a:r>
-          </a:p>
-          <a:p>
-            <a:pPr algn="l">
-              <a:spcAft>
-                <a:spcPts val="800"/>
-              </a:spcAft>
-            </a:pPr>
-            <a:r>
-              <a:rPr sz="1500" b="0">
-                <a:solidFill>
-                  <a:srgbClr val="1B2A49"/>
-                </a:solidFill>
-                <a:latin typeface="Calibri"/>
-              </a:rPr>
-              <a:t>IMAGES: Wikimedia Commons (CC BY-SA 3.0/4.0, CC0) - see slide notes</a:t>
+            <a:r>
+              <a:rPr lang="en-US" dirty="0"/>
+              <a:t>Alman, J., Duan, R., Williams, V. V., Xu, Y., Xu, Z., &amp; Zhou, R. (2024). More asymmetry yields faster matrix multiplication. </a:t>
+            </a:r>
+            <a:r>
+              <a:rPr lang="en-US" i="1" dirty="0" err="1"/>
+              <a:t>arXiv</a:t>
+            </a:r>
+            <a:r>
+              <a:rPr lang="en-US" dirty="0"/>
+              <a:t>. https://arxiv.org/abs/2404.16349</a:t>
+            </a:r>
+          </a:p>
+          <a:p>
+            <a:r>
+              <a:rPr lang="en-US" dirty="0" err="1"/>
+              <a:t>ByteQuest</a:t>
+            </a:r>
+            <a:r>
+              <a:rPr lang="en-US" dirty="0"/>
+              <a:t>. (n.d.). </a:t>
+            </a:r>
+            <a:r>
+              <a:rPr lang="en-US" i="1" dirty="0"/>
+              <a:t>Strassen algorithm visually explained</a:t>
+            </a:r>
+            <a:r>
+              <a:rPr lang="en-US" dirty="0"/>
+              <a:t> [Video]. YouTube. https://www.youtube.com/watch?v=2IgZuVGwEb0</a:t>
+            </a:r>
+          </a:p>
+          <a:p>
+            <a:r>
+              <a:rPr lang="en-US" dirty="0"/>
+              <a:t>Demmel, J., Dumitriu, I., Holtz, O., &amp; Kleinberg, R. (2007). Fast matrix multiplication is stable. </a:t>
+            </a:r>
+            <a:r>
+              <a:rPr lang="en-US" i="1" dirty="0" err="1"/>
+              <a:t>Numerische</a:t>
+            </a:r>
+            <a:r>
+              <a:rPr lang="en-US" i="1" dirty="0"/>
+              <a:t> </a:t>
+            </a:r>
+            <a:r>
+              <a:rPr lang="en-US" i="1" dirty="0" err="1"/>
+              <a:t>Mathematik</a:t>
+            </a:r>
+            <a:r>
+              <a:rPr lang="en-US" i="1" dirty="0"/>
+              <a:t>, 106</a:t>
+            </a:r>
+            <a:r>
+              <a:rPr lang="en-US" dirty="0"/>
+              <a:t>, 199–224. https://doi.org/10.1007/s00211-007-0061-6</a:t>
+            </a:r>
+          </a:p>
+          <a:p>
+            <a:r>
+              <a:rPr lang="en-US" dirty="0"/>
+              <a:t>Fawzi, A., Balog, M., Huang, A., Hubert, T., Romera-Paredes, B., </a:t>
+            </a:r>
+            <a:r>
+              <a:rPr lang="en-US" dirty="0" err="1"/>
+              <a:t>Barekatain</a:t>
+            </a:r>
+            <a:r>
+              <a:rPr lang="en-US" dirty="0"/>
+              <a:t>, M., Novikov, A., Ruiz, F. J. R., </a:t>
+            </a:r>
+            <a:r>
+              <a:rPr lang="en-US" dirty="0" err="1"/>
+              <a:t>Schrittwieser</a:t>
+            </a:r>
+            <a:r>
+              <a:rPr lang="en-US" dirty="0"/>
+              <a:t>, J., </a:t>
+            </a:r>
+            <a:r>
+              <a:rPr lang="en-US" dirty="0" err="1"/>
+              <a:t>Swirszcz</a:t>
+            </a:r>
+            <a:r>
+              <a:rPr lang="en-US" dirty="0"/>
+              <a:t>, G., Silver, D., Hassabis, D., &amp; Kohli, P. (2022). Discovering faster matrix multiplication algorithms with reinforcement learning. </a:t>
+            </a:r>
+            <a:r>
+              <a:rPr lang="en-US" i="1" dirty="0"/>
+              <a:t>Nature, 610</a:t>
+            </a:r>
+            <a:r>
+              <a:rPr lang="en-US" dirty="0"/>
+              <a:t>, 47–53. https://doi.org/10.1038/s41586-022-05172-4</a:t>
+            </a:r>
+          </a:p>
+          <a:p>
+            <a:r>
+              <a:rPr lang="en-US" dirty="0" err="1"/>
+              <a:t>GeeksforGeeks</a:t>
+            </a:r>
+            <a:r>
+              <a:rPr lang="en-US" dirty="0"/>
+              <a:t>. (2025). </a:t>
+            </a:r>
+            <a:r>
+              <a:rPr lang="en-US" i="1" dirty="0"/>
+              <a:t>Strassen’s matrix multiplication</a:t>
+            </a:r>
+            <a:r>
+              <a:rPr lang="en-US" dirty="0"/>
+              <a:t>. https://www.geeksforgeeks.org/dsa/strassens-matrix-multiplication/</a:t>
+            </a:r>
+          </a:p>
+          <a:p>
+            <a:r>
+              <a:rPr lang="en-US" dirty="0"/>
+              <a:t>Sagar Choudhary. (n.d.). </a:t>
+            </a:r>
+            <a:r>
+              <a:rPr lang="en-US" i="1" dirty="0"/>
+              <a:t>Strassen’s matrix multiplication | Faster matrix multiplication explained with example</a:t>
+            </a:r>
+            <a:r>
+              <a:rPr lang="en-US" dirty="0"/>
+              <a:t> [Video]. YouTube. https://www.youtube.com/watch?v=cGmfchtOJi4</a:t>
+            </a:r>
+          </a:p>
+          <a:p>
+            <a:r>
+              <a:rPr lang="en-US" dirty="0"/>
+              <a:t>Strassen, V. (1969). Gaussian elimination is not optimal. </a:t>
+            </a:r>
+            <a:r>
+              <a:rPr lang="en-US" i="1" dirty="0" err="1"/>
+              <a:t>Numerische</a:t>
+            </a:r>
+            <a:r>
+              <a:rPr lang="en-US" i="1" dirty="0"/>
+              <a:t> </a:t>
+            </a:r>
+            <a:r>
+              <a:rPr lang="en-US" i="1" dirty="0" err="1"/>
+              <a:t>Mathematik</a:t>
+            </a:r>
+            <a:r>
+              <a:rPr lang="en-US" i="1" dirty="0"/>
+              <a:t>, 13</a:t>
+            </a:r>
+            <a:r>
+              <a:rPr lang="en-US" dirty="0"/>
+              <a:t>(4), 354–356. https://doi.org/10.1007/BF02165411</a:t>
+            </a:r>
+          </a:p>
+          <a:p>
+            <a:r>
+              <a:rPr lang="en-US" dirty="0"/>
+              <a:t>Wikipedia contributors. (n.d.). Computational complexity of matrix multiplication. In </a:t>
+            </a:r>
+            <a:r>
+              <a:rPr lang="en-US" i="1" dirty="0"/>
+              <a:t>Wikipedia</a:t>
+            </a:r>
+            <a:r>
+              <a:rPr lang="en-US" dirty="0"/>
+              <a:t>. Retrieved October 14, 2026, from https://en.wikipedia.org/wiki/Computational</a:t>
+            </a:r>
+            <a:r>
+              <a:rPr lang="en-US" i="1" dirty="0"/>
+              <a:t>complexity</a:t>
+            </a:r>
+            <a:r>
+              <a:rPr lang="en-US" dirty="0"/>
+              <a:t>of</a:t>
+            </a:r>
+            <a:r>
+              <a:rPr lang="en-US" i="1" dirty="0"/>
+              <a:t>matrix</a:t>
+            </a:r>
+            <a:r>
+              <a:rPr lang="en-US" dirty="0"/>
+              <a:t>multiplication</a:t>
+            </a:r>
+          </a:p>
+          <a:p>
+            <a:r>
+              <a:rPr lang="en-US" dirty="0"/>
+              <a:t>Wikipedia contributors. (n.d.). Strassen algorithm. In </a:t>
+            </a:r>
+            <a:r>
+              <a:rPr lang="en-US" i="1" dirty="0"/>
+              <a:t>Wikipedia</a:t>
+            </a:r>
+            <a:r>
+              <a:rPr lang="en-US" dirty="0"/>
+              <a:t>. Retrieved October 14, 2026, from https://en.wikipedia.org/wiki/Strassen_algorithm</a:t>
             </a:r>
           </a:p>
         </p:txBody>
@@ -4837,7 +4579,7 @@
 </file>
 
 <file path=ppt/slides/slide2.xml><?xml version="1.0" encoding="utf-8"?>
-<p:sld xmlns:a="http://schemas.openxmlformats.org/drawingml/2006/main" xmlns:p="http://schemas.openxmlformats.org/presentationml/2006/main" xmlns:r="http://schemas.openxmlformats.org/officeDocument/2006/relationships">
+<p:sld xmlns:a="http://schemas.openxmlformats.org/drawingml/2006/main" xmlns:r="http://schemas.openxmlformats.org/officeDocument/2006/relationships" xmlns:p="http://schemas.openxmlformats.org/presentationml/2006/main">
   <p:cSld>
     <p:spTree>
       <p:nvGrpSpPr>
@@ -4845,7 +4587,14 @@
         <p:cNvGrpSpPr/>
         <p:nvPr/>
       </p:nvGrpSpPr>
-      <p:grpSpPr/>
+      <p:grpSpPr>
+        <a:xfrm>
+          <a:off x="0" y="0"/>
+          <a:ext cx="0" cy="0"/>
+          <a:chOff x="0" y="0"/>
+          <a:chExt cx="0" cy="0"/>
+        </a:xfrm>
+      </p:grpSpPr>
       <p:sp>
         <p:nvSpPr>
           <p:cNvPr id="2" name="Rectangle 1"/>
@@ -4886,6 +4635,7 @@
           <a:lstStyle/>
           <a:p>
             <a:pPr algn="ctr"/>
+            <a:endParaRPr/>
           </a:p>
         </p:txBody>
       </p:sp>
@@ -4898,7 +4648,7 @@
         <p:spPr>
           <a:xfrm>
             <a:off x="457200" y="164592"/>
-            <a:ext cx="11247120" cy="731520"/>
+            <a:ext cx="11247120" cy="584775"/>
           </a:xfrm>
           <a:prstGeom prst="rect">
             <a:avLst/>
@@ -4917,27 +4667,42 @@
               </a:spcAft>
             </a:pPr>
             <a:r>
-              <a:rPr sz="3200" b="1">
+              <a:rPr sz="3200" b="1" dirty="0">
                 <a:solidFill>
                   <a:srgbClr val="FFFFFF"/>
                 </a:solidFill>
                 <a:latin typeface="Calibri"/>
               </a:rPr>
-              <a:t>The problem: multiplying two n × n matrices</a:t>
-            </a:r>
-          </a:p>
-        </p:txBody>
-      </p:sp>
-      <p:sp>
-        <p:nvSpPr>
-          <p:cNvPr id="4" name="TextBox 3"/>
+              <a:t>The proble</a:t>
+            </a:r>
+            <a:r>
+              <a:rPr lang="en-US" sz="3200" b="1" dirty="0">
+                <a:solidFill>
+                  <a:srgbClr val="FFFFFF"/>
+                </a:solidFill>
+                <a:latin typeface="Calibri"/>
+              </a:rPr>
+              <a:t>m</a:t>
+            </a:r>
+            <a:endParaRPr sz="3200" b="1" dirty="0">
+              <a:solidFill>
+                <a:srgbClr val="FFFFFF"/>
+              </a:solidFill>
+              <a:latin typeface="Calibri"/>
+            </a:endParaRPr>
+          </a:p>
+        </p:txBody>
+      </p:sp>
+      <p:sp>
+        <p:nvSpPr>
+          <p:cNvPr id="5" name="TextBox 4"/>
           <p:cNvSpPr txBox="1"/>
           <p:nvPr/>
         </p:nvSpPr>
         <p:spPr>
           <a:xfrm>
-            <a:off x="9418320" y="6446520"/>
-            <a:ext cx="2743200" cy="320040"/>
+            <a:off x="548640" y="1371600"/>
+            <a:ext cx="5669280" cy="2513509"/>
           </a:xfrm>
           <a:prstGeom prst="rect">
             <a:avLst/>
@@ -4950,59 +4715,89 @@
           </a:bodyPr>
           <a:lstStyle/>
           <a:p>
-            <a:pPr algn="r">
-              <a:spcAft>
-                <a:spcPts val="800"/>
-              </a:spcAft>
-            </a:pPr>
-            <a:r>
-              <a:rPr sz="1100" b="0">
-                <a:solidFill>
-                  <a:srgbClr val="555555"/>
-                </a:solidFill>
-                <a:latin typeface="Calibri"/>
-              </a:rPr>
-              <a:t>Segment 1 - Problem</a:t>
-            </a:r>
-          </a:p>
-        </p:txBody>
-      </p:sp>
-      <p:sp>
-        <p:nvSpPr>
-          <p:cNvPr id="5" name="TextBox 4"/>
-          <p:cNvSpPr txBox="1"/>
-          <p:nvPr/>
-        </p:nvSpPr>
-        <p:spPr>
-          <a:xfrm>
-            <a:off x="548640" y="1371600"/>
-            <a:ext cx="5669280" cy="4572000"/>
-          </a:xfrm>
-          <a:prstGeom prst="rect">
-            <a:avLst/>
-          </a:prstGeom>
-          <a:noFill/>
-        </p:spPr>
-        <p:txBody>
-          <a:bodyPr wrap="square">
-            <a:spAutoFit/>
-          </a:bodyPr>
-          <a:lstStyle/>
-          <a:p>
             <a:pPr algn="l">
               <a:spcAft>
                 <a:spcPts val="800"/>
               </a:spcAft>
             </a:pPr>
             <a:r>
-              <a:rPr sz="2400" b="0">
+              <a:rPr sz="2400" b="0" dirty="0">
                 <a:solidFill>
                   <a:srgbClr val="1B2A49"/>
                 </a:solidFill>
                 <a:latin typeface="Calibri"/>
               </a:rPr>
-              <a:t>C[i][j] = Σₖ A[i][k] · B[k][j]</a:t>
-            </a:r>
+              <a:t>C[</a:t>
+            </a:r>
+            <a:r>
+              <a:rPr sz="2400" b="0" dirty="0" err="1">
+                <a:solidFill>
+                  <a:srgbClr val="1B2A49"/>
+                </a:solidFill>
+                <a:latin typeface="Calibri"/>
+              </a:rPr>
+              <a:t>i</a:t>
+            </a:r>
+            <a:r>
+              <a:rPr sz="2400" b="0" dirty="0">
+                <a:solidFill>
+                  <a:srgbClr val="1B2A49"/>
+                </a:solidFill>
+                <a:latin typeface="Calibri"/>
+              </a:rPr>
+              <a:t>][j] = </a:t>
+            </a:r>
+            <a:r>
+              <a:rPr lang="en-US" sz="2400" dirty="0">
+                <a:solidFill>
+                  <a:srgbClr val="1B2A49"/>
+                </a:solidFill>
+                <a:latin typeface="Calibri"/>
+              </a:rPr>
+              <a:t>sum(</a:t>
+            </a:r>
+            <a:r>
+              <a:rPr sz="2400" b="0" dirty="0">
+                <a:solidFill>
+                  <a:srgbClr val="1B2A49"/>
+                </a:solidFill>
+                <a:latin typeface="Calibri"/>
+              </a:rPr>
+              <a:t>A[</a:t>
+            </a:r>
+            <a:r>
+              <a:rPr sz="2400" b="0" dirty="0" err="1">
+                <a:solidFill>
+                  <a:srgbClr val="1B2A49"/>
+                </a:solidFill>
+                <a:latin typeface="Calibri"/>
+              </a:rPr>
+              <a:t>i</a:t>
+            </a:r>
+            <a:r>
+              <a:rPr sz="2400" b="0" dirty="0">
+                <a:solidFill>
+                  <a:srgbClr val="1B2A49"/>
+                </a:solidFill>
+                <a:latin typeface="Calibri"/>
+              </a:rPr>
+              <a:t>][k] · B[k][j]</a:t>
+            </a:r>
+            <a:r>
+              <a:rPr lang="en-US" sz="2400" b="0" dirty="0">
+                <a:solidFill>
+                  <a:srgbClr val="1B2A49"/>
+                </a:solidFill>
+                <a:latin typeface="Calibri"/>
+              </a:rPr>
+              <a:t>)</a:t>
+            </a:r>
+            <a:endParaRPr sz="2400" b="0" dirty="0">
+              <a:solidFill>
+                <a:srgbClr val="1B2A49"/>
+              </a:solidFill>
+              <a:latin typeface="Calibri"/>
+            </a:endParaRPr>
           </a:p>
           <a:p>
             <a:pPr algn="l">
@@ -5011,13 +4806,31 @@
               </a:spcAft>
             </a:pPr>
             <a:r>
-              <a:rPr sz="2400" b="0">
+              <a:rPr sz="2400" b="0" dirty="0">
                 <a:solidFill>
                   <a:srgbClr val="1B2A49"/>
                 </a:solidFill>
                 <a:latin typeface="Calibri"/>
               </a:rPr>
-              <a:t>n² entries in C, each needs n multiplications  →  n³ multiplications</a:t>
+              <a:t>n² entries in C, each needs n multiplications  </a:t>
+            </a:r>
+            <a:r>
+              <a:rPr lang="en-US" sz="2400" b="0" dirty="0">
+                <a:solidFill>
+                  <a:srgbClr val="1B2A49"/>
+                </a:solidFill>
+                <a:latin typeface="Calibri"/>
+              </a:rPr>
+              <a:t>-&gt;</a:t>
+            </a:r>
+            <a:r>
+              <a:rPr sz="2400" b="0" dirty="0">
+                <a:solidFill>
+                  <a:srgbClr val="1B2A49"/>
+                </a:solidFill>
+                <a:latin typeface="Calibri"/>
+              </a:rPr>
+              <a:t>  n³ multiplications</a:t>
             </a:r>
           </a:p>
           <a:p>
@@ -5027,29 +4840,13 @@
               </a:spcAft>
             </a:pPr>
             <a:r>
-              <a:rPr sz="2400" b="0">
+              <a:rPr sz="2400" b="0" dirty="0">
                 <a:solidFill>
                   <a:srgbClr val="1B2A49"/>
                 </a:solidFill>
                 <a:latin typeface="Calibri"/>
               </a:rPr>
               <a:t>Used everywhere: neural networks, graphics, solving linear systems, graph algorithms</a:t>
-            </a:r>
-          </a:p>
-          <a:p>
-            <a:pPr algn="l">
-              <a:spcAft>
-                <a:spcPts val="800"/>
-              </a:spcAft>
-            </a:pPr>
-            <a:r>
-              <a:rPr sz="2400" b="0">
-                <a:solidFill>
-                  <a:srgbClr val="1B2A49"/>
-                </a:solidFill>
-                <a:latin typeface="Calibri"/>
-              </a:rPr>
-              <a:t>For 60 years nobody thought you could do better.</a:t>
             </a:r>
           </a:p>
         </p:txBody>
@@ -5073,8 +4870,20 @@
                 <a:tableStyleId>{5C22544A-7EE6-4342-B048-85BDC9FD1C3A}</a:tableStyleId>
               </a:tblPr>
               <a:tblGrid>
-                <a:gridCol w="1280160"/>
-                <a:gridCol w="3840480"/>
+                <a:gridCol w="1280160">
+                  <a:extLst>
+                    <a:ext uri="{9D8B030D-6E8A-4147-A177-3AD203B41FA5}">
+                      <a16:colId xmlns:a16="http://schemas.microsoft.com/office/drawing/2014/main" val="20000"/>
+                    </a:ext>
+                  </a:extLst>
+                </a:gridCol>
+                <a:gridCol w="3840480">
+                  <a:extLst>
+                    <a:ext uri="{9D8B030D-6E8A-4147-A177-3AD203B41FA5}">
+                      <a16:colId xmlns:a16="http://schemas.microsoft.com/office/drawing/2014/main" val="20001"/>
+                    </a:ext>
+                  </a:extLst>
+                </a:gridCol>
               </a:tblGrid>
               <a:tr h="411480">
                 <a:tc>
@@ -5125,6 +4934,11 @@
                     </a:solidFill>
                   </a:tcPr>
                 </a:tc>
+                <a:extLst>
+                  <a:ext uri="{0D108BD9-81ED-4DB2-BD59-A6C34878D82A}">
+                    <a16:rowId xmlns:a16="http://schemas.microsoft.com/office/drawing/2014/main" val="10000"/>
+                  </a:ext>
+                </a:extLst>
               </a:tr>
               <a:tr h="411480">
                 <a:tc>
@@ -5175,6 +4989,11 @@
                     </a:solidFill>
                   </a:tcPr>
                 </a:tc>
+                <a:extLst>
+                  <a:ext uri="{0D108BD9-81ED-4DB2-BD59-A6C34878D82A}">
+                    <a16:rowId xmlns:a16="http://schemas.microsoft.com/office/drawing/2014/main" val="10001"/>
+                  </a:ext>
+                </a:extLst>
               </a:tr>
               <a:tr h="411480">
                 <a:tc>
@@ -5225,6 +5044,11 @@
                     </a:solidFill>
                   </a:tcPr>
                 </a:tc>
+                <a:extLst>
+                  <a:ext uri="{0D108BD9-81ED-4DB2-BD59-A6C34878D82A}">
+                    <a16:rowId xmlns:a16="http://schemas.microsoft.com/office/drawing/2014/main" val="10002"/>
+                  </a:ext>
+                </a:extLst>
               </a:tr>
               <a:tr h="411480">
                 <a:tc>
@@ -5275,6 +5099,11 @@
                     </a:solidFill>
                   </a:tcPr>
                 </a:tc>
+                <a:extLst>
+                  <a:ext uri="{0D108BD9-81ED-4DB2-BD59-A6C34878D82A}">
+                    <a16:rowId xmlns:a16="http://schemas.microsoft.com/office/drawing/2014/main" val="10003"/>
+                  </a:ext>
+                </a:extLst>
               </a:tr>
               <a:tr h="411480">
                 <a:tc>
@@ -5325,11 +5154,46 @@
                     </a:solidFill>
                   </a:tcPr>
                 </a:tc>
+                <a:extLst>
+                  <a:ext uri="{0D108BD9-81ED-4DB2-BD59-A6C34878D82A}">
+                    <a16:rowId xmlns:a16="http://schemas.microsoft.com/office/drawing/2014/main" val="10004"/>
+                  </a:ext>
+                </a:extLst>
               </a:tr>
             </a:tbl>
           </a:graphicData>
         </a:graphic>
       </p:graphicFrame>
+      <p:pic>
+        <p:nvPicPr>
+          <p:cNvPr id="7" name="Picture 6" descr="Matrix Multiplication-Why is it a big deal? | by Charchithowitzer | Medium">
+            <a:extLst>
+              <a:ext uri="{FF2B5EF4-FFF2-40B4-BE49-F238E27FC236}">
+                <a16:creationId xmlns:a16="http://schemas.microsoft.com/office/drawing/2014/main" id="{A4BCEB43-0156-1A6A-9A33-469C97369DF7}"/>
+              </a:ext>
+            </a:extLst>
+          </p:cNvPr>
+          <p:cNvPicPr>
+            <a:picLocks noChangeAspect="1"/>
+          </p:cNvPicPr>
+          <p:nvPr/>
+        </p:nvPicPr>
+        <p:blipFill>
+          <a:blip r:embed="rId3"/>
+          <a:stretch>
+            <a:fillRect/>
+          </a:stretch>
+        </p:blipFill>
+        <p:spPr>
+          <a:xfrm>
+            <a:off x="1698770" y="4080365"/>
+            <a:ext cx="7003514" cy="2366155"/>
+          </a:xfrm>
+          <a:prstGeom prst="rect">
+            <a:avLst/>
+          </a:prstGeom>
+        </p:spPr>
+      </p:pic>
     </p:spTree>
   </p:cSld>
   <p:clrMapOvr>
@@ -5339,7 +5203,7 @@
 </file>
 
 <file path=ppt/slides/slide3.xml><?xml version="1.0" encoding="utf-8"?>
-<p:sld xmlns:a="http://schemas.openxmlformats.org/drawingml/2006/main" xmlns:p="http://schemas.openxmlformats.org/presentationml/2006/main" xmlns:r="http://schemas.openxmlformats.org/officeDocument/2006/relationships">
+<p:sld xmlns:a="http://schemas.openxmlformats.org/drawingml/2006/main" xmlns:r="http://schemas.openxmlformats.org/officeDocument/2006/relationships" xmlns:p="http://schemas.openxmlformats.org/presentationml/2006/main">
   <p:cSld>
     <p:spTree>
       <p:nvGrpSpPr>
@@ -5347,7 +5211,14 @@
         <p:cNvGrpSpPr/>
         <p:nvPr/>
       </p:nvGrpSpPr>
-      <p:grpSpPr/>
+      <p:grpSpPr>
+        <a:xfrm>
+          <a:off x="0" y="0"/>
+          <a:ext cx="0" cy="0"/>
+          <a:chOff x="0" y="0"/>
+          <a:chExt cx="0" cy="0"/>
+        </a:xfrm>
+      </p:grpSpPr>
       <p:sp>
         <p:nvSpPr>
           <p:cNvPr id="2" name="Rectangle 1"/>
@@ -5388,6 +5259,7 @@
           <a:lstStyle/>
           <a:p>
             <a:pPr algn="ctr"/>
+            <a:endParaRPr/>
           </a:p>
         </p:txBody>
       </p:sp>
@@ -5400,7 +5272,7 @@
         <p:spPr>
           <a:xfrm>
             <a:off x="457200" y="164592"/>
-            <a:ext cx="11247120" cy="731520"/>
+            <a:ext cx="11247120" cy="584775"/>
           </a:xfrm>
           <a:prstGeom prst="rect">
             <a:avLst/>
@@ -5419,52 +5291,22 @@
               </a:spcAft>
             </a:pPr>
             <a:r>
-              <a:rPr sz="3200" b="1">
+              <a:rPr lang="en-US" sz="3200" b="1" dirty="0">
                 <a:solidFill>
                   <a:srgbClr val="FFFFFF"/>
                 </a:solidFill>
                 <a:latin typeface="Calibri"/>
               </a:rPr>
-              <a:t>Idea 1: divide and conquer on blocks</a:t>
-            </a:r>
-          </a:p>
-        </p:txBody>
-      </p:sp>
-      <p:sp>
-        <p:nvSpPr>
-          <p:cNvPr id="4" name="TextBox 3"/>
-          <p:cNvSpPr txBox="1"/>
-          <p:nvPr/>
-        </p:nvSpPr>
-        <p:spPr>
-          <a:xfrm>
-            <a:off x="9418320" y="6446520"/>
-            <a:ext cx="2743200" cy="320040"/>
-          </a:xfrm>
-          <a:prstGeom prst="rect">
-            <a:avLst/>
-          </a:prstGeom>
-          <a:noFill/>
-        </p:spPr>
-        <p:txBody>
-          <a:bodyPr wrap="square">
-            <a:spAutoFit/>
-          </a:bodyPr>
-          <a:lstStyle/>
-          <a:p>
-            <a:pPr algn="r">
-              <a:spcAft>
-                <a:spcPts val="800"/>
-              </a:spcAft>
-            </a:pPr>
-            <a:r>
-              <a:rPr sz="1100" b="0">
-                <a:solidFill>
-                  <a:srgbClr val="555555"/>
-                </a:solidFill>
-                <a:latin typeface="Calibri"/>
-              </a:rPr>
-              <a:t>Segment 2 - How it works</a:t>
+              <a:t>Divide </a:t>
+            </a:r>
+            <a:r>
+              <a:rPr sz="3200" b="1" dirty="0">
+                <a:solidFill>
+                  <a:srgbClr val="FFFFFF"/>
+                </a:solidFill>
+                <a:latin typeface="Calibri"/>
+              </a:rPr>
+              <a:t>and conquer</a:t>
             </a:r>
           </a:p>
         </p:txBody>
@@ -5693,8 +5535,8 @@
         </p:nvSpPr>
         <p:spPr>
           <a:xfrm>
-            <a:off x="2331720" y="2011680"/>
-            <a:ext cx="548640" cy="731520"/>
+            <a:off x="2171700" y="2182167"/>
+            <a:ext cx="548640" cy="461665"/>
           </a:xfrm>
           <a:prstGeom prst="rect">
             <a:avLst/>
@@ -5713,14 +5555,20 @@
               </a:spcAft>
             </a:pPr>
             <a:r>
-              <a:rPr sz="4000" b="1">
-                <a:solidFill>
-                  <a:srgbClr val="555555"/>
-                </a:solidFill>
-                <a:latin typeface="Calibri"/>
-              </a:rPr>
-              <a:t>×</a:t>
-            </a:r>
+              <a:rPr lang="en-US" sz="2400" dirty="0">
+                <a:solidFill>
+                  <a:srgbClr val="1B2A49"/>
+                </a:solidFill>
+                <a:latin typeface="Calibri"/>
+              </a:rPr>
+              <a:t>x</a:t>
+            </a:r>
+            <a:endParaRPr sz="2400" dirty="0">
+              <a:solidFill>
+                <a:srgbClr val="1B2A49"/>
+              </a:solidFill>
+              <a:latin typeface="Calibri"/>
+            </a:endParaRPr>
           </a:p>
         </p:txBody>
       </p:sp>
@@ -6136,6 +5984,7 @@
               </a:defRPr>
             </a:pPr>
             <a:r>
+              <a:rPr dirty="0"/>
               <a:t>C21</a:t>
             </a:r>
           </a:p>
@@ -6190,6 +6039,7 @@
               </a:defRPr>
             </a:pPr>
             <a:r>
+              <a:rPr dirty="0"/>
               <a:t>C22</a:t>
             </a:r>
           </a:p>
@@ -6203,8 +6053,8 @@
         </p:nvSpPr>
         <p:spPr>
           <a:xfrm>
-            <a:off x="548640" y="3474720"/>
-            <a:ext cx="5943600" cy="457200"/>
+            <a:off x="548640" y="4158287"/>
+            <a:ext cx="5943600" cy="461665"/>
           </a:xfrm>
           <a:prstGeom prst="rect">
             <a:avLst/>
@@ -6223,13 +6073,31 @@
               </a:spcAft>
             </a:pPr>
             <a:r>
-              <a:rPr sz="1800" b="0">
-                <a:solidFill>
-                  <a:srgbClr val="555555"/>
-                </a:solidFill>
-                <a:latin typeface="Calibri"/>
-              </a:rPr>
-              <a:t>Each block is (n/2 × n/2)</a:t>
+              <a:rPr sz="2400" dirty="0">
+                <a:solidFill>
+                  <a:srgbClr val="1B2A49"/>
+                </a:solidFill>
+                <a:latin typeface="Calibri"/>
+              </a:rPr>
+              <a:t>Each block is (n/2 </a:t>
+            </a:r>
+            <a:r>
+              <a:rPr lang="en-US" sz="2400" dirty="0">
+                <a:solidFill>
+                  <a:srgbClr val="1B2A49"/>
+                </a:solidFill>
+                <a:latin typeface="Calibri"/>
+              </a:rPr>
+              <a:t>x</a:t>
+            </a:r>
+            <a:r>
+              <a:rPr sz="2400" dirty="0">
+                <a:solidFill>
+                  <a:srgbClr val="1B2A49"/>
+                </a:solidFill>
+                <a:latin typeface="Calibri"/>
+              </a:rPr>
+              <a:t> n/2)</a:t>
             </a:r>
           </a:p>
         </p:txBody>
@@ -6242,8 +6110,8 @@
         </p:nvSpPr>
         <p:spPr>
           <a:xfrm>
-            <a:off x="548640" y="4206240"/>
-            <a:ext cx="5943600" cy="1463040"/>
+            <a:off x="548640" y="5212080"/>
+            <a:ext cx="5943600" cy="933589"/>
           </a:xfrm>
           <a:prstGeom prst="rect">
             <a:avLst/>
@@ -6262,9 +6130,9 @@
               </a:spcAft>
             </a:pPr>
             <a:r>
-              <a:rPr sz="2400" b="1">
-                <a:solidFill>
-                  <a:srgbClr val="E05A2B"/>
+              <a:rPr sz="2400" dirty="0">
+                <a:solidFill>
+                  <a:srgbClr val="1B2A49"/>
                 </a:solidFill>
                 <a:latin typeface="Calibri"/>
               </a:rPr>
@@ -6278,13 +6146,49 @@
               </a:spcAft>
             </a:pPr>
             <a:r>
-              <a:rPr sz="2400" b="1">
-                <a:solidFill>
-                  <a:srgbClr val="E05A2B"/>
-                </a:solidFill>
-                <a:latin typeface="Calibri"/>
-              </a:rPr>
-              <a:t>T(n) = 8T(n/2) + Θ(n²) = Θ(n³)</a:t>
+              <a:rPr sz="2400" dirty="0">
+                <a:solidFill>
+                  <a:srgbClr val="1B2A49"/>
+                </a:solidFill>
+                <a:latin typeface="Calibri"/>
+              </a:rPr>
+              <a:t>T(n) = 8T(n/2) + </a:t>
+            </a:r>
+            <a:r>
+              <a:rPr lang="en-US" sz="2400" dirty="0">
+                <a:solidFill>
+                  <a:srgbClr val="1B2A49"/>
+                </a:solidFill>
+                <a:latin typeface="Calibri"/>
+              </a:rPr>
+              <a:t>Theta</a:t>
+            </a:r>
+            <a:r>
+              <a:rPr sz="2400" dirty="0">
+                <a:solidFill>
+                  <a:srgbClr val="1B2A49"/>
+                </a:solidFill>
+                <a:latin typeface="Calibri"/>
+              </a:rPr>
+              <a:t>(n²) = </a:t>
+            </a:r>
+            <a:r>
+              <a:rPr lang="en-US" sz="2400" dirty="0">
+                <a:solidFill>
+                  <a:srgbClr val="1B2A49"/>
+                </a:solidFill>
+                <a:latin typeface="Calibri"/>
+              </a:rPr>
+              <a:t>Theta</a:t>
+            </a:r>
+            <a:r>
+              <a:rPr sz="2400" dirty="0">
+                <a:solidFill>
+                  <a:srgbClr val="1B2A49"/>
+                </a:solidFill>
+                <a:latin typeface="Calibri"/>
+              </a:rPr>
+              <a:t>(n³)</a:t>
             </a:r>
           </a:p>
         </p:txBody>
@@ -6297,8 +6201,8 @@
         </p:nvSpPr>
         <p:spPr>
           <a:xfrm>
-            <a:off x="6949440" y="1371600"/>
-            <a:ext cx="4937760" cy="4754880"/>
+            <a:off x="6888480" y="3432387"/>
+            <a:ext cx="4937760" cy="2821285"/>
           </a:xfrm>
           <a:prstGeom prst="rect">
             <a:avLst/>
@@ -6317,7 +6221,7 @@
               </a:spcAft>
             </a:pPr>
             <a:r>
-              <a:rPr sz="2400" b="0">
+              <a:rPr sz="2400" b="0" dirty="0">
                 <a:solidFill>
                   <a:srgbClr val="1B2A49"/>
                 </a:solidFill>
@@ -6333,7 +6237,7 @@
               </a:spcAft>
             </a:pPr>
             <a:r>
-              <a:rPr sz="2400" b="0">
+              <a:rPr sz="2400" b="0" dirty="0">
                 <a:solidFill>
                   <a:srgbClr val="1B2A49"/>
                 </a:solidFill>
@@ -6349,7 +6253,7 @@
               </a:spcAft>
             </a:pPr>
             <a:r>
-              <a:rPr sz="2400" b="0">
+              <a:rPr sz="2400" b="0" dirty="0">
                 <a:solidFill>
                   <a:srgbClr val="1B2A49"/>
                 </a:solidFill>
@@ -6365,7 +6269,7 @@
               </a:spcAft>
             </a:pPr>
             <a:r>
-              <a:rPr sz="2400" b="0">
+              <a:rPr sz="2400" b="0" dirty="0">
                 <a:solidFill>
                   <a:srgbClr val="1B2A49"/>
                 </a:solidFill>
@@ -6381,13 +6285,49 @@
               </a:spcAft>
             </a:pPr>
             <a:r>
-              <a:rPr sz="2400" b="0">
+              <a:rPr sz="2400" b="0" dirty="0">
                 <a:solidFill>
                   <a:srgbClr val="1B2A49"/>
                 </a:solidFill>
                 <a:latin typeface="Calibri"/>
               </a:rPr>
-              <a:t>8 half-size multiplications  →  still n³</a:t>
+              <a:t>8 </a:t>
+            </a:r>
+            <a:r>
+              <a:rPr lang="en-US" sz="2400" b="0" dirty="0">
+                <a:solidFill>
+                  <a:srgbClr val="1B2A49"/>
+                </a:solidFill>
+                <a:latin typeface="Calibri"/>
+              </a:rPr>
+              <a:t>smaller</a:t>
+            </a:r>
+            <a:r>
+              <a:rPr sz="2400" b="0" dirty="0">
+                <a:solidFill>
+                  <a:srgbClr val="1B2A49"/>
+                </a:solidFill>
+                <a:latin typeface="Calibri"/>
+              </a:rPr>
+              <a:t> multiplications  </a:t>
+            </a:r>
+            <a:r>
+              <a:rPr lang="en-US" sz="2400" dirty="0">
+                <a:solidFill>
+                  <a:srgbClr val="1B2A49"/>
+                </a:solidFill>
+                <a:latin typeface="Calibri"/>
+              </a:rPr>
+              <a:t>-&gt;</a:t>
+            </a:r>
+            <a:r>
+              <a:rPr sz="2400" b="0" dirty="0">
+                <a:solidFill>
+                  <a:srgbClr val="1B2A49"/>
+                </a:solidFill>
+                <a:latin typeface="Calibri"/>
+              </a:rPr>
+              <a:t>  still n³</a:t>
             </a:r>
           </a:p>
           <a:p>
@@ -6397,13 +6337,13 @@
               </a:spcAft>
             </a:pPr>
             <a:r>
-              <a:rPr sz="2400" b="0">
+              <a:rPr sz="2400" b="0" dirty="0">
                 <a:solidFill>
                   <a:srgbClr val="1B2A49"/>
                 </a:solidFill>
                 <a:latin typeface="Calibri"/>
               </a:rPr>
-              <a:t>Additions are cheap (n² work). Multiplications are what recurse.</a:t>
+              <a:t>Additions are cheap (n² work)</a:t>
             </a:r>
           </a:p>
         </p:txBody>
@@ -6417,7 +6357,7 @@
 </file>
 
 <file path=ppt/slides/slide4.xml><?xml version="1.0" encoding="utf-8"?>
-<p:sld xmlns:a="http://schemas.openxmlformats.org/drawingml/2006/main" xmlns:p="http://schemas.openxmlformats.org/presentationml/2006/main" xmlns:r="http://schemas.openxmlformats.org/officeDocument/2006/relationships">
+<p:sld xmlns:a="http://schemas.openxmlformats.org/drawingml/2006/main" xmlns:r="http://schemas.openxmlformats.org/officeDocument/2006/relationships" xmlns:p="http://schemas.openxmlformats.org/presentationml/2006/main">
   <p:cSld>
     <p:spTree>
       <p:nvGrpSpPr>
@@ -6425,7 +6365,14 @@
         <p:cNvGrpSpPr/>
         <p:nvPr/>
       </p:nvGrpSpPr>
-      <p:grpSpPr/>
+      <p:grpSpPr>
+        <a:xfrm>
+          <a:off x="0" y="0"/>
+          <a:ext cx="0" cy="0"/>
+          <a:chOff x="0" y="0"/>
+          <a:chExt cx="0" cy="0"/>
+        </a:xfrm>
+      </p:grpSpPr>
       <p:sp>
         <p:nvSpPr>
           <p:cNvPr id="2" name="Rectangle 1"/>
@@ -6466,6 +6413,7 @@
           <a:lstStyle/>
           <a:p>
             <a:pPr algn="ctr"/>
+            <a:endParaRPr/>
           </a:p>
         </p:txBody>
       </p:sp>
@@ -6478,7 +6426,7 @@
         <p:spPr>
           <a:xfrm>
             <a:off x="457200" y="164592"/>
-            <a:ext cx="11247120" cy="731520"/>
+            <a:ext cx="11247120" cy="584775"/>
           </a:xfrm>
           <a:prstGeom prst="rect">
             <a:avLst/>
@@ -6497,53 +6445,20 @@
               </a:spcAft>
             </a:pPr>
             <a:r>
-              <a:rPr sz="3200" b="1">
+              <a:rPr lang="en-US" sz="3200" b="1" dirty="0">
                 <a:solidFill>
                   <a:srgbClr val="FFFFFF"/>
                 </a:solidFill>
                 <a:latin typeface="Calibri"/>
               </a:rPr>
-              <a:t>Idea 2: seven products instead of eight</a:t>
-            </a:r>
-          </a:p>
-        </p:txBody>
-      </p:sp>
-      <p:sp>
-        <p:nvSpPr>
-          <p:cNvPr id="4" name="TextBox 3"/>
-          <p:cNvSpPr txBox="1"/>
-          <p:nvPr/>
-        </p:nvSpPr>
-        <p:spPr>
-          <a:xfrm>
-            <a:off x="9418320" y="6446520"/>
-            <a:ext cx="2743200" cy="320040"/>
-          </a:xfrm>
-          <a:prstGeom prst="rect">
-            <a:avLst/>
-          </a:prstGeom>
-          <a:noFill/>
-        </p:spPr>
-        <p:txBody>
-          <a:bodyPr wrap="square">
-            <a:spAutoFit/>
-          </a:bodyPr>
-          <a:lstStyle/>
-          <a:p>
-            <a:pPr algn="r">
-              <a:spcAft>
-                <a:spcPts val="800"/>
-              </a:spcAft>
-            </a:pPr>
-            <a:r>
-              <a:rPr sz="1100" b="0">
-                <a:solidFill>
-                  <a:srgbClr val="555555"/>
-                </a:solidFill>
-                <a:latin typeface="Calibri"/>
-              </a:rPr>
-              <a:t>Segment 2 - How it works</a:t>
-            </a:r>
+              <a:t>Seven products instead of Eight</a:t>
+            </a:r>
+            <a:endParaRPr sz="3200" b="1" dirty="0">
+              <a:solidFill>
+                <a:srgbClr val="FFFFFF"/>
+              </a:solidFill>
+              <a:latin typeface="Calibri"/>
+            </a:endParaRPr>
           </a:p>
         </p:txBody>
       </p:sp>
@@ -6573,52 +6488,13 @@
       </p:pic>
       <p:sp>
         <p:nvSpPr>
-          <p:cNvPr id="6" name="TextBox 5"/>
-          <p:cNvSpPr txBox="1"/>
-          <p:nvPr/>
-        </p:nvSpPr>
-        <p:spPr>
-          <a:xfrm>
-            <a:off x="365760" y="3611880"/>
-            <a:ext cx="11430000" cy="457200"/>
-          </a:xfrm>
-          <a:prstGeom prst="rect">
-            <a:avLst/>
-          </a:prstGeom>
-          <a:noFill/>
-        </p:spPr>
-        <p:txBody>
-          <a:bodyPr wrap="square">
-            <a:spAutoFit/>
-          </a:bodyPr>
-          <a:lstStyle/>
-          <a:p>
-            <a:pPr algn="ctr">
-              <a:spcAft>
-                <a:spcPts val="800"/>
-              </a:spcAft>
-            </a:pPr>
-            <a:r>
-              <a:rPr sz="1100" b="0">
-                <a:solidFill>
-                  <a:srgbClr val="555555"/>
-                </a:solidFill>
-                <a:latin typeface="Calibri"/>
-              </a:rPr>
-              <a:t>Each column M₁…M₇ is one product. Cyp, CC BY-SA 3.0</a:t>
-            </a:r>
-          </a:p>
-        </p:txBody>
-      </p:sp>
-      <p:sp>
-        <p:nvSpPr>
           <p:cNvPr id="7" name="TextBox 6"/>
           <p:cNvSpPr txBox="1"/>
           <p:nvPr/>
         </p:nvSpPr>
         <p:spPr>
           <a:xfrm>
-            <a:off x="548640" y="3611880"/>
+            <a:off x="1029547" y="3822633"/>
             <a:ext cx="5669280" cy="1645920"/>
           </a:xfrm>
           <a:prstGeom prst="rect">
@@ -6638,7 +6514,7 @@
               </a:spcAft>
             </a:pPr>
             <a:r>
-              <a:rPr sz="1900" b="0">
+              <a:rPr sz="1900" b="0" dirty="0">
                 <a:solidFill>
                   <a:srgbClr val="1B2A49"/>
                 </a:solidFill>
@@ -6654,7 +6530,7 @@
               </a:spcAft>
             </a:pPr>
             <a:r>
-              <a:rPr sz="1900" b="0">
+              <a:rPr sz="1900" b="0" dirty="0">
                 <a:solidFill>
                   <a:srgbClr val="1B2A49"/>
                 </a:solidFill>
@@ -6670,7 +6546,7 @@
               </a:spcAft>
             </a:pPr>
             <a:r>
-              <a:rPr sz="1900" b="0">
+              <a:rPr sz="1900" b="0" dirty="0">
                 <a:solidFill>
                   <a:srgbClr val="1B2A49"/>
                 </a:solidFill>
@@ -6686,7 +6562,7 @@
               </a:spcAft>
             </a:pPr>
             <a:r>
-              <a:rPr sz="1900" b="0">
+              <a:rPr sz="1900" b="0" dirty="0">
                 <a:solidFill>
                   <a:srgbClr val="1B2A49"/>
                 </a:solidFill>
@@ -6705,7 +6581,7 @@
         </p:nvSpPr>
         <p:spPr>
           <a:xfrm>
-            <a:off x="6309360" y="3611880"/>
+            <a:off x="6803813" y="4029354"/>
             <a:ext cx="5669280" cy="1645920"/>
           </a:xfrm>
           <a:prstGeom prst="rect">
@@ -6725,7 +6601,7 @@
               </a:spcAft>
             </a:pPr>
             <a:r>
-              <a:rPr sz="1900" b="0">
+              <a:rPr sz="1900" b="0" dirty="0">
                 <a:solidFill>
                   <a:srgbClr val="1B2A49"/>
                 </a:solidFill>
@@ -6741,7 +6617,7 @@
               </a:spcAft>
             </a:pPr>
             <a:r>
-              <a:rPr sz="1900" b="0">
+              <a:rPr sz="1900" b="0" dirty="0">
                 <a:solidFill>
                   <a:srgbClr val="1B2A49"/>
                 </a:solidFill>
@@ -6757,7 +6633,7 @@
               </a:spcAft>
             </a:pPr>
             <a:r>
-              <a:rPr sz="1900" b="0">
+              <a:rPr sz="1900" b="0" dirty="0">
                 <a:solidFill>
                   <a:srgbClr val="1B2A49"/>
                 </a:solidFill>
@@ -6776,8 +6652,8 @@
         </p:nvSpPr>
         <p:spPr>
           <a:xfrm>
-            <a:off x="457200" y="5349240"/>
-            <a:ext cx="11338560" cy="548640"/>
+            <a:off x="1134533" y="5931747"/>
+            <a:ext cx="11338560" cy="384721"/>
           </a:xfrm>
           <a:prstGeom prst="rect">
             <a:avLst/>
@@ -6796,52 +6672,13 @@
               </a:spcAft>
             </a:pPr>
             <a:r>
-              <a:rPr sz="2200" b="1">
-                <a:solidFill>
-                  <a:srgbClr val="E05A2B"/>
+              <a:rPr sz="1900" dirty="0">
+                <a:solidFill>
+                  <a:srgbClr val="1B2A49"/>
                 </a:solidFill>
                 <a:latin typeface="Calibri"/>
               </a:rPr>
               <a:t>C₁₁ = M₁ + M₄ − M₅ + M₇     C₁₂ = M₃ + M₅     C₂₁ = M₂ + M₄     C₂₂ = M₁ − M₂ + M₃ + M₆</a:t>
-            </a:r>
-          </a:p>
-        </p:txBody>
-      </p:sp>
-      <p:sp>
-        <p:nvSpPr>
-          <p:cNvPr id="10" name="TextBox 9"/>
-          <p:cNvSpPr txBox="1"/>
-          <p:nvPr/>
-        </p:nvSpPr>
-        <p:spPr>
-          <a:xfrm>
-            <a:off x="457200" y="5852160"/>
-            <a:ext cx="11247120" cy="548640"/>
-          </a:xfrm>
-          <a:prstGeom prst="rect">
-            <a:avLst/>
-          </a:prstGeom>
-          <a:noFill/>
-        </p:spPr>
-        <p:txBody>
-          <a:bodyPr wrap="square">
-            <a:spAutoFit/>
-          </a:bodyPr>
-          <a:lstStyle/>
-          <a:p>
-            <a:pPr algn="l">
-              <a:spcAft>
-                <a:spcPts val="800"/>
-              </a:spcAft>
-            </a:pPr>
-            <a:r>
-              <a:rPr sz="1800" b="0">
-                <a:solidFill>
-                  <a:srgbClr val="555555"/>
-                </a:solidFill>
-                <a:latin typeface="Calibri"/>
-              </a:rPr>
-              <a:t>7 multiplications, 18 additions/subtractions of half-size blocks. Trade one expensive multiply for a handful of cheap adds.</a:t>
             </a:r>
           </a:p>
         </p:txBody>
@@ -6855,7 +6692,7 @@
 </file>
 
 <file path=ppt/slides/slide5.xml><?xml version="1.0" encoding="utf-8"?>
-<p:sld xmlns:a="http://schemas.openxmlformats.org/drawingml/2006/main" xmlns:p="http://schemas.openxmlformats.org/presentationml/2006/main" xmlns:r="http://schemas.openxmlformats.org/officeDocument/2006/relationships">
+<p:sld xmlns:a="http://schemas.openxmlformats.org/drawingml/2006/main" xmlns:r="http://schemas.openxmlformats.org/officeDocument/2006/relationships" xmlns:p="http://schemas.openxmlformats.org/presentationml/2006/main">
   <p:cSld>
     <p:spTree>
       <p:nvGrpSpPr>
@@ -6863,7 +6700,14 @@
         <p:cNvGrpSpPr/>
         <p:nvPr/>
       </p:nvGrpSpPr>
-      <p:grpSpPr/>
+      <p:grpSpPr>
+        <a:xfrm>
+          <a:off x="0" y="0"/>
+          <a:ext cx="0" cy="0"/>
+          <a:chOff x="0" y="0"/>
+          <a:chExt cx="0" cy="0"/>
+        </a:xfrm>
+      </p:grpSpPr>
       <p:sp>
         <p:nvSpPr>
           <p:cNvPr id="2" name="Rectangle 1"/>
@@ -6904,6 +6748,7 @@
           <a:lstStyle/>
           <a:p>
             <a:pPr algn="ctr"/>
+            <a:endParaRPr/>
           </a:p>
         </p:txBody>
       </p:sp>
@@ -6948,14 +6793,14 @@
       </p:sp>
       <p:sp>
         <p:nvSpPr>
-          <p:cNvPr id="4" name="TextBox 3"/>
+          <p:cNvPr id="5" name="TextBox 4"/>
           <p:cNvSpPr txBox="1"/>
           <p:nvPr/>
         </p:nvSpPr>
         <p:spPr>
           <a:xfrm>
-            <a:off x="9418320" y="6446520"/>
-            <a:ext cx="2743200" cy="320040"/>
+            <a:off x="457200" y="1188720"/>
+            <a:ext cx="11247120" cy="779701"/>
           </a:xfrm>
           <a:prstGeom prst="rect">
             <a:avLst/>
@@ -6968,58 +6813,55 @@
           </a:bodyPr>
           <a:lstStyle/>
           <a:p>
-            <a:pPr algn="r">
-              <a:spcAft>
-                <a:spcPts val="800"/>
-              </a:spcAft>
-            </a:pPr>
-            <a:r>
-              <a:rPr sz="1100" b="0">
-                <a:solidFill>
-                  <a:srgbClr val="555555"/>
-                </a:solidFill>
-                <a:latin typeface="Calibri"/>
-              </a:rPr>
-              <a:t>Segment 5 - Complexity</a:t>
-            </a:r>
-          </a:p>
-        </p:txBody>
-      </p:sp>
-      <p:sp>
-        <p:nvSpPr>
-          <p:cNvPr id="5" name="TextBox 4"/>
-          <p:cNvSpPr txBox="1"/>
-          <p:nvPr/>
-        </p:nvSpPr>
-        <p:spPr>
-          <a:xfrm>
-            <a:off x="457200" y="1188720"/>
-            <a:ext cx="11247120" cy="1645920"/>
-          </a:xfrm>
-          <a:prstGeom prst="rect">
-            <a:avLst/>
-          </a:prstGeom>
-          <a:noFill/>
-        </p:spPr>
-        <p:txBody>
-          <a:bodyPr wrap="square">
-            <a:spAutoFit/>
-          </a:bodyPr>
-          <a:lstStyle/>
-          <a:p>
             <a:pPr algn="l">
               <a:spcAft>
                 <a:spcPts val="800"/>
               </a:spcAft>
             </a:pPr>
             <a:r>
-              <a:rPr sz="2600" b="1">
-                <a:solidFill>
-                  <a:srgbClr val="E05A2B"/>
-                </a:solidFill>
-                <a:latin typeface="Calibri"/>
-              </a:rPr>
-              <a:t>T(n) = 7 · T(n/2) + Θ(n²)</a:t>
+              <a:rPr sz="1900" dirty="0">
+                <a:solidFill>
+                  <a:srgbClr val="1B2A49"/>
+                </a:solidFill>
+                <a:latin typeface="Calibri"/>
+              </a:rPr>
+              <a:t>T(n) = 7 </a:t>
+            </a:r>
+            <a:r>
+              <a:rPr lang="en-US" sz="1900" dirty="0">
+                <a:solidFill>
+                  <a:srgbClr val="1B2A49"/>
+                </a:solidFill>
+                <a:latin typeface="Calibri"/>
+              </a:rPr>
+              <a:t>x</a:t>
+            </a:r>
+            <a:r>
+              <a:rPr sz="1900" dirty="0">
+                <a:solidFill>
+                  <a:srgbClr val="1B2A49"/>
+                </a:solidFill>
+                <a:latin typeface="Calibri"/>
+              </a:rPr>
+              <a:t> T(n/2) + </a:t>
+            </a:r>
+            <a:r>
+              <a:rPr lang="en-US" sz="1900" dirty="0">
+                <a:solidFill>
+                  <a:srgbClr val="1B2A49"/>
+                </a:solidFill>
+                <a:latin typeface="Calibri"/>
+              </a:rPr>
+              <a:t>Theta</a:t>
+            </a:r>
+            <a:r>
+              <a:rPr sz="1900" dirty="0">
+                <a:solidFill>
+                  <a:srgbClr val="1B2A49"/>
+                </a:solidFill>
+                <a:latin typeface="Calibri"/>
+              </a:rPr>
+              <a:t>(n²)</a:t>
             </a:r>
           </a:p>
           <a:p>
@@ -7029,29 +6871,31 @@
               </a:spcAft>
             </a:pPr>
             <a:r>
-              <a:rPr sz="2600" b="1">
-                <a:solidFill>
-                  <a:srgbClr val="E05A2B"/>
-                </a:solidFill>
-                <a:latin typeface="Calibri"/>
-              </a:rPr>
-              <a:t>Master theorem: a = 7, b = 2, n^log₂7 ≈ n^2.807 &gt; n²</a:t>
-            </a:r>
-          </a:p>
-          <a:p>
-            <a:pPr algn="l">
-              <a:spcAft>
-                <a:spcPts val="800"/>
-              </a:spcAft>
-            </a:pPr>
-            <a:r>
-              <a:rPr sz="2600" b="1">
-                <a:solidFill>
-                  <a:srgbClr val="E05A2B"/>
-                </a:solidFill>
-                <a:latin typeface="Calibri"/>
-              </a:rPr>
-              <a:t>→ the leaves dominate:  T(n) = Θ(n^log₂7) ≈ Θ(n^2.807)</a:t>
+              <a:rPr sz="1900" dirty="0">
+                <a:solidFill>
+                  <a:srgbClr val="1B2A49"/>
+                </a:solidFill>
+                <a:latin typeface="Calibri"/>
+              </a:rPr>
+              <a:t>Master theorem: a = 7, b = 2, n^log₂7 </a:t>
+            </a:r>
+            <a:r>
+              <a:rPr lang="en-US" sz="1900" dirty="0">
+                <a:solidFill>
+                  <a:srgbClr val="1B2A49"/>
+                </a:solidFill>
+                <a:latin typeface="Calibri"/>
+              </a:rPr>
+              <a:t>approx. =</a:t>
+            </a:r>
+            <a:r>
+              <a:rPr sz="1900" dirty="0">
+                <a:solidFill>
+                  <a:srgbClr val="1B2A49"/>
+                </a:solidFill>
+                <a:latin typeface="Calibri"/>
+              </a:rPr>
+              <a:t> n^2.807 &gt; n²</a:t>
             </a:r>
           </a:p>
         </p:txBody>
@@ -7062,7 +6906,13 @@
           <p:cNvGraphicFramePr>
             <a:graphicFrameLocks noGrp="1"/>
           </p:cNvGraphicFramePr>
-          <p:nvPr/>
+          <p:nvPr>
+            <p:extLst>
+              <p:ext uri="{D42A27DB-BD31-4B8C-83A1-F6EECF244321}">
+                <p14:modId xmlns:p14="http://schemas.microsoft.com/office/powerpoint/2010/main" val="3170233069"/>
+              </p:ext>
+            </p:extLst>
+          </p:nvPr>
         </p:nvGraphicFramePr>
         <p:xfrm>
           <a:off x="457200" y="2926080"/>
@@ -7075,10 +6925,34 @@
                 <a:tableStyleId>{5C22544A-7EE6-4342-B048-85BDC9FD1C3A}</a:tableStyleId>
               </a:tblPr>
               <a:tblGrid>
-                <a:gridCol w="1554480"/>
-                <a:gridCol w="3200400"/>
-                <a:gridCol w="2743200"/>
-                <a:gridCol w="3749039"/>
+                <a:gridCol w="1554480">
+                  <a:extLst>
+                    <a:ext uri="{9D8B030D-6E8A-4147-A177-3AD203B41FA5}">
+                      <a16:colId xmlns:a16="http://schemas.microsoft.com/office/drawing/2014/main" val="20000"/>
+                    </a:ext>
+                  </a:extLst>
+                </a:gridCol>
+                <a:gridCol w="3200400">
+                  <a:extLst>
+                    <a:ext uri="{9D8B030D-6E8A-4147-A177-3AD203B41FA5}">
+                      <a16:colId xmlns:a16="http://schemas.microsoft.com/office/drawing/2014/main" val="20001"/>
+                    </a:ext>
+                  </a:extLst>
+                </a:gridCol>
+                <a:gridCol w="2743200">
+                  <a:extLst>
+                    <a:ext uri="{9D8B030D-6E8A-4147-A177-3AD203B41FA5}">
+                      <a16:colId xmlns:a16="http://schemas.microsoft.com/office/drawing/2014/main" val="20002"/>
+                    </a:ext>
+                  </a:extLst>
+                </a:gridCol>
+                <a:gridCol w="3749039">
+                  <a:extLst>
+                    <a:ext uri="{9D8B030D-6E8A-4147-A177-3AD203B41FA5}">
+                      <a16:colId xmlns:a16="http://schemas.microsoft.com/office/drawing/2014/main" val="20003"/>
+                    </a:ext>
+                  </a:extLst>
+                </a:gridCol>
               </a:tblGrid>
               <a:tr h="457200">
                 <a:tc>
@@ -7119,6 +6993,7 @@
                         </a:defRPr>
                       </a:pPr>
                       <a:r>
+                        <a:rPr dirty="0"/>
                         <a:t>Subproblems 7ᵏ</a:t>
                       </a:r>
                     </a:p>
@@ -7167,8 +7042,18 @@
                         </a:defRPr>
                       </a:pPr>
                       <a:r>
-                        <a:t>Add. work per level</a:t>
+                        <a:rPr lang="en-US" dirty="0"/>
+                        <a:t>Extra</a:t>
                       </a:r>
+                      <a:r>
+                        <a:rPr dirty="0"/>
+                        <a:t> work per </a:t>
+                      </a:r>
+                      <a:r>
+                        <a:rPr lang="en-US" dirty="0"/>
+                        <a:t>recurse</a:t>
+                      </a:r>
+                      <a:endParaRPr dirty="0"/>
                     </a:p>
                   </a:txBody>
                   <a:tcPr>
@@ -7177,6 +7062,11 @@
                     </a:solidFill>
                   </a:tcPr>
                 </a:tc>
+                <a:extLst>
+                  <a:ext uri="{0D108BD9-81ED-4DB2-BD59-A6C34878D82A}">
+                    <a16:rowId xmlns:a16="http://schemas.microsoft.com/office/drawing/2014/main" val="10000"/>
+                  </a:ext>
+                </a:extLst>
               </a:tr>
               <a:tr h="457200">
                 <a:tc>
@@ -7275,6 +7165,11 @@
                     </a:solidFill>
                   </a:tcPr>
                 </a:tc>
+                <a:extLst>
+                  <a:ext uri="{0D108BD9-81ED-4DB2-BD59-A6C34878D82A}">
+                    <a16:rowId xmlns:a16="http://schemas.microsoft.com/office/drawing/2014/main" val="10001"/>
+                  </a:ext>
+                </a:extLst>
               </a:tr>
               <a:tr h="457200">
                 <a:tc>
@@ -7363,7 +7258,16 @@
                         </a:defRPr>
                       </a:pPr>
                       <a:r>
-                        <a:t>7/4 · n²</a:t>
+                        <a:rPr dirty="0"/>
+                        <a:t>7/4 </a:t>
+                      </a:r>
+                      <a:r>
+                        <a:rPr lang="en-US" dirty="0"/>
+                        <a:t>x</a:t>
+                      </a:r>
+                      <a:r>
+                        <a:rPr dirty="0"/>
+                        <a:t> n²</a:t>
                       </a:r>
                     </a:p>
                   </a:txBody>
@@ -7373,6 +7277,11 @@
                     </a:solidFill>
                   </a:tcPr>
                 </a:tc>
+                <a:extLst>
+                  <a:ext uri="{0D108BD9-81ED-4DB2-BD59-A6C34878D82A}">
+                    <a16:rowId xmlns:a16="http://schemas.microsoft.com/office/drawing/2014/main" val="10002"/>
+                  </a:ext>
+                </a:extLst>
               </a:tr>
               <a:tr h="457200">
                 <a:tc>
@@ -7461,7 +7370,16 @@
                         </a:defRPr>
                       </a:pPr>
                       <a:r>
-                        <a:t>(7/4)² · n²</a:t>
+                        <a:rPr dirty="0"/>
+                        <a:t>(7/4)² </a:t>
+                      </a:r>
+                      <a:r>
+                        <a:rPr lang="en-US" dirty="0"/>
+                        <a:t>x</a:t>
+                      </a:r>
+                      <a:r>
+                        <a:rPr dirty="0"/>
+                        <a:t> n²</a:t>
                       </a:r>
                     </a:p>
                   </a:txBody>
@@ -7471,6 +7389,11 @@
                     </a:solidFill>
                   </a:tcPr>
                 </a:tc>
+                <a:extLst>
+                  <a:ext uri="{0D108BD9-81ED-4DB2-BD59-A6C34878D82A}">
+                    <a16:rowId xmlns:a16="http://schemas.microsoft.com/office/drawing/2014/main" val="10003"/>
+                  </a:ext>
+                </a:extLst>
               </a:tr>
               <a:tr h="457200">
                 <a:tc>
@@ -7486,9 +7409,7 @@
                           <a:latin typeface="Calibri"/>
                         </a:defRPr>
                       </a:pPr>
-                      <a:r>
-                        <a:t>…</a:t>
-                      </a:r>
+                      <a:endParaRPr dirty="0"/>
                     </a:p>
                   </a:txBody>
                   <a:tcPr>
@@ -7510,9 +7431,7 @@
                           <a:latin typeface="Calibri"/>
                         </a:defRPr>
                       </a:pPr>
-                      <a:r>
-                        <a:t>…</a:t>
-                      </a:r>
+                      <a:endParaRPr dirty="0"/>
                     </a:p>
                   </a:txBody>
                   <a:tcPr>
@@ -7534,9 +7453,7 @@
                           <a:latin typeface="Calibri"/>
                         </a:defRPr>
                       </a:pPr>
-                      <a:r>
-                        <a:t>…</a:t>
-                      </a:r>
+                      <a:endParaRPr dirty="0"/>
                     </a:p>
                   </a:txBody>
                   <a:tcPr>
@@ -7558,9 +7475,7 @@
                           <a:latin typeface="Calibri"/>
                         </a:defRPr>
                       </a:pPr>
-                      <a:r>
-                        <a:t>…</a:t>
-                      </a:r>
+                      <a:endParaRPr dirty="0"/>
                     </a:p>
                   </a:txBody>
                   <a:tcPr>
@@ -7569,6 +7484,11 @@
                     </a:solidFill>
                   </a:tcPr>
                 </a:tc>
+                <a:extLst>
+                  <a:ext uri="{0D108BD9-81ED-4DB2-BD59-A6C34878D82A}">
+                    <a16:rowId xmlns:a16="http://schemas.microsoft.com/office/drawing/2014/main" val="10004"/>
+                  </a:ext>
+                </a:extLst>
               </a:tr>
               <a:tr h="457200">
                 <a:tc>
@@ -7585,6 +7505,7 @@
                         </a:defRPr>
                       </a:pPr>
                       <a:r>
+                        <a:rPr dirty="0"/>
                         <a:t>log₂ n</a:t>
                       </a:r>
                     </a:p>
@@ -7657,7 +7578,24 @@
                         </a:defRPr>
                       </a:pPr>
                       <a:r>
-                        <a:t>(7/4)^log₂n · n² = n^log₂7</a:t>
+                        <a:rPr dirty="0"/>
+                        <a:t>(7/4)^</a:t>
+                      </a:r>
+                      <a:r>
+                        <a:rPr dirty="0" err="1"/>
+                        <a:t>log₂n</a:t>
+                      </a:r>
+                      <a:r>
+                        <a:rPr dirty="0"/>
+                        <a:t> </a:t>
+                      </a:r>
+                      <a:r>
+                        <a:rPr lang="en-US" dirty="0"/>
+                        <a:t>x</a:t>
+                      </a:r>
+                      <a:r>
+                        <a:rPr dirty="0"/>
+                        <a:t> n² = n^log₂7</a:t>
                       </a:r>
                     </a:p>
                   </a:txBody>
@@ -7667,50 +7605,16 @@
                     </a:solidFill>
                   </a:tcPr>
                 </a:tc>
+                <a:extLst>
+                  <a:ext uri="{0D108BD9-81ED-4DB2-BD59-A6C34878D82A}">
+                    <a16:rowId xmlns:a16="http://schemas.microsoft.com/office/drawing/2014/main" val="10005"/>
+                  </a:ext>
+                </a:extLst>
               </a:tr>
             </a:tbl>
           </a:graphicData>
         </a:graphic>
       </p:graphicFrame>
-      <p:sp>
-        <p:nvSpPr>
-          <p:cNvPr id="7" name="TextBox 6"/>
-          <p:cNvSpPr txBox="1"/>
-          <p:nvPr/>
-        </p:nvSpPr>
-        <p:spPr>
-          <a:xfrm>
-            <a:off x="457200" y="5760720"/>
-            <a:ext cx="11247120" cy="822960"/>
-          </a:xfrm>
-          <a:prstGeom prst="rect">
-            <a:avLst/>
-          </a:prstGeom>
-          <a:noFill/>
-        </p:spPr>
-        <p:txBody>
-          <a:bodyPr wrap="square">
-            <a:spAutoFit/>
-          </a:bodyPr>
-          <a:lstStyle/>
-          <a:p>
-            <a:pPr algn="l">
-              <a:spcAft>
-                <a:spcPts val="800"/>
-              </a:spcAft>
-            </a:pPr>
-            <a:r>
-              <a:rPr sz="2000" b="0">
-                <a:solidFill>
-                  <a:srgbClr val="555555"/>
-                </a:solidFill>
-                <a:latin typeface="Calibri"/>
-              </a:rPr>
-              <a:t>Each level saves 1/8 of the multiplications; across log₂n levels that compounds: (7/8)^log₂n = n^(−0.193). For n = 1024: 7¹⁰ ≈ 2.8 × 10⁸ vs 1024³ ≈ 1.07 × 10⁹.</a:t>
-            </a:r>
-          </a:p>
-        </p:txBody>
-      </p:sp>
     </p:spTree>
   </p:cSld>
   <p:clrMapOvr>
@@ -7720,7 +7624,7 @@
 </file>
 
 <file path=ppt/slides/slide6.xml><?xml version="1.0" encoding="utf-8"?>
-<p:sld xmlns:a="http://schemas.openxmlformats.org/drawingml/2006/main" xmlns:p="http://schemas.openxmlformats.org/presentationml/2006/main" xmlns:r="http://schemas.openxmlformats.org/officeDocument/2006/relationships">
+<p:sld xmlns:a="http://schemas.openxmlformats.org/drawingml/2006/main" xmlns:r="http://schemas.openxmlformats.org/officeDocument/2006/relationships" xmlns:p="http://schemas.openxmlformats.org/presentationml/2006/main">
   <p:cSld>
     <p:spTree>
       <p:nvGrpSpPr>
@@ -7728,7 +7632,14 @@
         <p:cNvGrpSpPr/>
         <p:nvPr/>
       </p:nvGrpSpPr>
-      <p:grpSpPr/>
+      <p:grpSpPr>
+        <a:xfrm>
+          <a:off x="0" y="0"/>
+          <a:ext cx="0" cy="0"/>
+          <a:chOff x="0" y="0"/>
+          <a:chExt cx="0" cy="0"/>
+        </a:xfrm>
+      </p:grpSpPr>
       <p:sp>
         <p:nvSpPr>
           <p:cNvPr id="2" name="Rectangle 1"/>
@@ -7769,6 +7680,7 @@
           <a:lstStyle/>
           <a:p>
             <a:pPr algn="ctr"/>
+            <a:endParaRPr/>
           </a:p>
         </p:txBody>
       </p:sp>
@@ -7781,7 +7693,7 @@
         <p:spPr>
           <a:xfrm>
             <a:off x="457200" y="164592"/>
-            <a:ext cx="11247120" cy="731520"/>
+            <a:ext cx="11247120" cy="584775"/>
           </a:xfrm>
           <a:prstGeom prst="rect">
             <a:avLst/>
@@ -7800,13 +7712,13 @@
               </a:spcAft>
             </a:pPr>
             <a:r>
-              <a:rPr sz="3200" b="1">
+              <a:rPr sz="3200" b="1" dirty="0">
                 <a:solidFill>
                   <a:srgbClr val="FFFFFF"/>
                 </a:solidFill>
                 <a:latin typeface="Calibri"/>
               </a:rPr>
-              <a:t>Classical vs Strassen: multiplications at the leaves</a:t>
+              <a:t>Classical vs Strassen</a:t>
             </a:r>
           </a:p>
         </p:txBody>
@@ -7856,7 +7768,13 @@
           <p:cNvGraphicFramePr>
             <a:graphicFrameLocks noGrp="1"/>
           </p:cNvGraphicFramePr>
-          <p:nvPr/>
+          <p:nvPr>
+            <p:extLst>
+              <p:ext uri="{D42A27DB-BD31-4B8C-83A1-F6EECF244321}">
+                <p14:modId xmlns:p14="http://schemas.microsoft.com/office/powerpoint/2010/main" val="1962776733"/>
+              </p:ext>
+            </p:extLst>
+          </p:nvPr>
         </p:nvGraphicFramePr>
         <p:xfrm>
           <a:off x="731520" y="1554480"/>
@@ -7869,10 +7787,34 @@
                 <a:tableStyleId>{5C22544A-7EE6-4342-B048-85BDC9FD1C3A}</a:tableStyleId>
               </a:tblPr>
               <a:tblGrid>
-                <a:gridCol w="1828800"/>
-                <a:gridCol w="3200400"/>
-                <a:gridCol w="3383280"/>
-                <a:gridCol w="2286000"/>
+                <a:gridCol w="1828800">
+                  <a:extLst>
+                    <a:ext uri="{9D8B030D-6E8A-4147-A177-3AD203B41FA5}">
+                      <a16:colId xmlns:a16="http://schemas.microsoft.com/office/drawing/2014/main" val="20000"/>
+                    </a:ext>
+                  </a:extLst>
+                </a:gridCol>
+                <a:gridCol w="3200400">
+                  <a:extLst>
+                    <a:ext uri="{9D8B030D-6E8A-4147-A177-3AD203B41FA5}">
+                      <a16:colId xmlns:a16="http://schemas.microsoft.com/office/drawing/2014/main" val="20001"/>
+                    </a:ext>
+                  </a:extLst>
+                </a:gridCol>
+                <a:gridCol w="3383280">
+                  <a:extLst>
+                    <a:ext uri="{9D8B030D-6E8A-4147-A177-3AD203B41FA5}">
+                      <a16:colId xmlns:a16="http://schemas.microsoft.com/office/drawing/2014/main" val="20002"/>
+                    </a:ext>
+                  </a:extLst>
+                </a:gridCol>
+                <a:gridCol w="2286000">
+                  <a:extLst>
+                    <a:ext uri="{9D8B030D-6E8A-4147-A177-3AD203B41FA5}">
+                      <a16:colId xmlns:a16="http://schemas.microsoft.com/office/drawing/2014/main" val="20003"/>
+                    </a:ext>
+                  </a:extLst>
+                </a:gridCol>
               </a:tblGrid>
               <a:tr h="640080">
                 <a:tc>
@@ -7913,7 +7855,8 @@
                         </a:defRPr>
                       </a:pPr>
                       <a:r>
-                        <a:t>Classical n³</a:t>
+                        <a:rPr dirty="0"/>
+                        <a:t>Classical</a:t>
                       </a:r>
                     </a:p>
                   </a:txBody>
@@ -7971,6 +7914,11 @@
                     </a:solidFill>
                   </a:tcPr>
                 </a:tc>
+                <a:extLst>
+                  <a:ext uri="{0D108BD9-81ED-4DB2-BD59-A6C34878D82A}">
+                    <a16:rowId xmlns:a16="http://schemas.microsoft.com/office/drawing/2014/main" val="10000"/>
+                  </a:ext>
+                </a:extLst>
               </a:tr>
               <a:tr h="640080">
                 <a:tc>
@@ -8011,7 +7959,8 @@
                         </a:defRPr>
                       </a:pPr>
                       <a:r>
-                        <a:t>4,096</a:t>
+                        <a:rPr dirty="0"/>
+                        <a:t>4096</a:t>
                       </a:r>
                     </a:p>
                   </a:txBody>
@@ -8035,7 +7984,8 @@
                         </a:defRPr>
                       </a:pPr>
                       <a:r>
-                        <a:t>2,401</a:t>
+                        <a:rPr dirty="0"/>
+                        <a:t>2401</a:t>
                       </a:r>
                     </a:p>
                   </a:txBody>
@@ -8059,8 +8009,14 @@
                         </a:defRPr>
                       </a:pPr>
                       <a:r>
-                        <a:t>1.7×</a:t>
+                        <a:rPr dirty="0"/>
+                        <a:t>1.7</a:t>
                       </a:r>
+                      <a:r>
+                        <a:rPr lang="en-US" dirty="0"/>
+                        <a:t>x</a:t>
+                      </a:r>
+                      <a:endParaRPr dirty="0"/>
                     </a:p>
                   </a:txBody>
                   <a:tcPr>
@@ -8069,6 +8025,11 @@
                     </a:solidFill>
                   </a:tcPr>
                 </a:tc>
+                <a:extLst>
+                  <a:ext uri="{0D108BD9-81ED-4DB2-BD59-A6C34878D82A}">
+                    <a16:rowId xmlns:a16="http://schemas.microsoft.com/office/drawing/2014/main" val="10001"/>
+                  </a:ext>
+                </a:extLst>
               </a:tr>
               <a:tr h="640080">
                 <a:tc>
@@ -8109,7 +8070,8 @@
                         </a:defRPr>
                       </a:pPr>
                       <a:r>
-                        <a:t>16,777,216</a:t>
+                        <a:rPr dirty="0"/>
+                        <a:t>16777216</a:t>
                       </a:r>
                     </a:p>
                   </a:txBody>
@@ -8133,7 +8095,8 @@
                         </a:defRPr>
                       </a:pPr>
                       <a:r>
-                        <a:t>5,764,801</a:t>
+                        <a:rPr dirty="0"/>
+                        <a:t>5764801</a:t>
                       </a:r>
                     </a:p>
                   </a:txBody>
@@ -8157,8 +8120,14 @@
                         </a:defRPr>
                       </a:pPr>
                       <a:r>
-                        <a:t>2.9×</a:t>
+                        <a:rPr dirty="0"/>
+                        <a:t>2.9</a:t>
                       </a:r>
+                      <a:r>
+                        <a:rPr lang="en-US" dirty="0"/>
+                        <a:t>x</a:t>
+                      </a:r>
+                      <a:endParaRPr dirty="0"/>
                     </a:p>
                   </a:txBody>
                   <a:tcPr>
@@ -8167,6 +8136,11 @@
                     </a:solidFill>
                   </a:tcPr>
                 </a:tc>
+                <a:extLst>
+                  <a:ext uri="{0D108BD9-81ED-4DB2-BD59-A6C34878D82A}">
+                    <a16:rowId xmlns:a16="http://schemas.microsoft.com/office/drawing/2014/main" val="10002"/>
+                  </a:ext>
+                </a:extLst>
               </a:tr>
               <a:tr h="640080">
                 <a:tc>
@@ -8183,7 +8157,8 @@
                         </a:defRPr>
                       </a:pPr>
                       <a:r>
-                        <a:t>1,024</a:t>
+                        <a:rPr dirty="0"/>
+                        <a:t>1024</a:t>
                       </a:r>
                     </a:p>
                   </a:txBody>
@@ -8207,7 +8182,8 @@
                         </a:defRPr>
                       </a:pPr>
                       <a:r>
-                        <a:t>1,073,741,824</a:t>
+                        <a:rPr dirty="0"/>
+                        <a:t>1073741824</a:t>
                       </a:r>
                     </a:p>
                   </a:txBody>
@@ -8231,7 +8207,8 @@
                         </a:defRPr>
                       </a:pPr>
                       <a:r>
-                        <a:t>282,475,249</a:t>
+                        <a:rPr dirty="0"/>
+                        <a:t>282475249</a:t>
                       </a:r>
                     </a:p>
                   </a:txBody>
@@ -8255,8 +8232,14 @@
                         </a:defRPr>
                       </a:pPr>
                       <a:r>
-                        <a:t>3.8×</a:t>
+                        <a:rPr dirty="0"/>
+                        <a:t>3.8</a:t>
                       </a:r>
+                      <a:r>
+                        <a:rPr lang="en-US" dirty="0"/>
+                        <a:t>x</a:t>
+                      </a:r>
+                      <a:endParaRPr dirty="0"/>
                     </a:p>
                   </a:txBody>
                   <a:tcPr>
@@ -8265,6 +8248,11 @@
                     </a:solidFill>
                   </a:tcPr>
                 </a:tc>
+                <a:extLst>
+                  <a:ext uri="{0D108BD9-81ED-4DB2-BD59-A6C34878D82A}">
+                    <a16:rowId xmlns:a16="http://schemas.microsoft.com/office/drawing/2014/main" val="10003"/>
+                  </a:ext>
+                </a:extLst>
               </a:tr>
               <a:tr h="640080">
                 <a:tc>
@@ -8281,7 +8269,8 @@
                         </a:defRPr>
                       </a:pPr>
                       <a:r>
-                        <a:t>8,192</a:t>
+                        <a:rPr dirty="0"/>
+                        <a:t>8192</a:t>
                       </a:r>
                     </a:p>
                   </a:txBody>
@@ -8305,7 +8294,16 @@
                         </a:defRPr>
                       </a:pPr>
                       <a:r>
-                        <a:t>5.5 × 10¹¹</a:t>
+                        <a:rPr dirty="0"/>
+                        <a:t>5.5 </a:t>
+                      </a:r>
+                      <a:r>
+                        <a:rPr lang="en-US" dirty="0"/>
+                        <a:t>x</a:t>
+                      </a:r>
+                      <a:r>
+                        <a:rPr dirty="0"/>
+                        <a:t> 10¹¹</a:t>
                       </a:r>
                     </a:p>
                   </a:txBody>
@@ -8329,7 +8327,16 @@
                         </a:defRPr>
                       </a:pPr>
                       <a:r>
-                        <a:t>9.7 × 10¹⁰</a:t>
+                        <a:rPr dirty="0"/>
+                        <a:t>9.7 </a:t>
+                      </a:r>
+                      <a:r>
+                        <a:rPr lang="en-US" dirty="0"/>
+                        <a:t>x</a:t>
+                      </a:r>
+                      <a:r>
+                        <a:rPr dirty="0"/>
+                        <a:t> 10¹⁰</a:t>
                       </a:r>
                     </a:p>
                   </a:txBody>
@@ -8353,8 +8360,14 @@
                         </a:defRPr>
                       </a:pPr>
                       <a:r>
-                        <a:t>5.7×</a:t>
+                        <a:rPr dirty="0"/>
+                        <a:t>5.7</a:t>
                       </a:r>
+                      <a:r>
+                        <a:rPr lang="en-US" dirty="0"/>
+                        <a:t>x</a:t>
+                      </a:r>
+                      <a:endParaRPr dirty="0"/>
                     </a:p>
                   </a:txBody>
                   <a:tcPr>
@@ -8363,6 +8376,11 @@
                     </a:solidFill>
                   </a:tcPr>
                 </a:tc>
+                <a:extLst>
+                  <a:ext uri="{0D108BD9-81ED-4DB2-BD59-A6C34878D82A}">
+                    <a16:rowId xmlns:a16="http://schemas.microsoft.com/office/drawing/2014/main" val="10004"/>
+                  </a:ext>
+                </a:extLst>
               </a:tr>
             </a:tbl>
           </a:graphicData>
@@ -8377,7 +8395,7 @@
         <p:spPr>
           <a:xfrm>
             <a:off x="731520" y="5029200"/>
-            <a:ext cx="10698480" cy="1097280"/>
+            <a:ext cx="10698480" cy="830997"/>
           </a:xfrm>
           <a:prstGeom prst="rect">
             <a:avLst/>
@@ -8396,9 +8414,9 @@
               </a:spcAft>
             </a:pPr>
             <a:r>
-              <a:rPr sz="2200" b="0">
-                <a:solidFill>
-                  <a:srgbClr val="555555"/>
+              <a:rPr sz="2400" dirty="0">
+                <a:solidFill>
+                  <a:srgbClr val="1B2A49"/>
                 </a:solidFill>
                 <a:latin typeface="Calibri"/>
               </a:rPr>
@@ -8416,7 +8434,7 @@
 </file>
 
 <file path=ppt/slides/slide7.xml><?xml version="1.0" encoding="utf-8"?>
-<p:sld xmlns:a="http://schemas.openxmlformats.org/drawingml/2006/main" xmlns:p="http://schemas.openxmlformats.org/presentationml/2006/main" xmlns:r="http://schemas.openxmlformats.org/officeDocument/2006/relationships">
+<p:sld xmlns:a="http://schemas.openxmlformats.org/drawingml/2006/main" xmlns:r="http://schemas.openxmlformats.org/officeDocument/2006/relationships" xmlns:p="http://schemas.openxmlformats.org/presentationml/2006/main">
   <p:cSld>
     <p:spTree>
       <p:nvGrpSpPr>
@@ -8424,7 +8442,14 @@
         <p:cNvGrpSpPr/>
         <p:nvPr/>
       </p:nvGrpSpPr>
-      <p:grpSpPr/>
+      <p:grpSpPr>
+        <a:xfrm>
+          <a:off x="0" y="0"/>
+          <a:ext cx="0" cy="0"/>
+          <a:chOff x="0" y="0"/>
+          <a:chExt cx="0" cy="0"/>
+        </a:xfrm>
+      </p:grpSpPr>
       <p:sp>
         <p:nvSpPr>
           <p:cNvPr id="2" name="Rectangle 1"/>
@@ -8465,6 +8490,7 @@
           <a:lstStyle/>
           <a:p>
             <a:pPr algn="ctr"/>
+            <a:endParaRPr/>
           </a:p>
         </p:txBody>
       </p:sp>
@@ -8509,14 +8535,14 @@
       </p:sp>
       <p:sp>
         <p:nvSpPr>
-          <p:cNvPr id="4" name="TextBox 3"/>
+          <p:cNvPr id="5" name="TextBox 4"/>
           <p:cNvSpPr txBox="1"/>
           <p:nvPr/>
         </p:nvSpPr>
         <p:spPr>
           <a:xfrm>
-            <a:off x="9418320" y="6446520"/>
-            <a:ext cx="2743200" cy="320040"/>
+            <a:off x="457200" y="1371600"/>
+            <a:ext cx="5577840" cy="2431435"/>
           </a:xfrm>
           <a:prstGeom prst="rect">
             <a:avLst/>
@@ -8529,33 +8555,177 @@
           </a:bodyPr>
           <a:lstStyle/>
           <a:p>
-            <a:pPr algn="r">
+            <a:pPr algn="l">
               <a:spcAft>
                 <a:spcPts val="800"/>
               </a:spcAft>
             </a:pPr>
             <a:r>
-              <a:rPr sz="1100" b="0">
-                <a:solidFill>
-                  <a:srgbClr val="555555"/>
-                </a:solidFill>
-                <a:latin typeface="Calibri"/>
-              </a:rPr>
-              <a:t>Segment 6 - Constraints</a:t>
-            </a:r>
-          </a:p>
-        </p:txBody>
-      </p:sp>
-      <p:sp>
-        <p:nvSpPr>
-          <p:cNvPr id="5" name="TextBox 4"/>
+              <a:rPr sz="2200" b="0" dirty="0">
+                <a:solidFill>
+                  <a:srgbClr val="1B2A49"/>
+                </a:solidFill>
+                <a:latin typeface="Calibri"/>
+              </a:rPr>
+              <a:t>WHEN IT APPLIES</a:t>
+            </a:r>
+          </a:p>
+          <a:p>
+            <a:pPr algn="l">
+              <a:spcAft>
+                <a:spcPts val="800"/>
+              </a:spcAft>
+            </a:pPr>
+            <a:r>
+              <a:rPr lang="en-US" sz="2200" dirty="0">
+                <a:solidFill>
+                  <a:srgbClr val="1B2A49"/>
+                </a:solidFill>
+                <a:latin typeface="Calibri"/>
+              </a:rPr>
+              <a:t>- </a:t>
+            </a:r>
+            <a:r>
+              <a:rPr sz="2200" b="0" dirty="0">
+                <a:solidFill>
+                  <a:srgbClr val="1B2A49"/>
+                </a:solidFill>
+                <a:latin typeface="Calibri"/>
+              </a:rPr>
+              <a:t>Needs subtraction: any ring (</a:t>
+            </a:r>
+            <a:r>
+              <a:rPr sz="2200" b="0" dirty="0" err="1">
+                <a:solidFill>
+                  <a:srgbClr val="1B2A49"/>
+                </a:solidFill>
+                <a:latin typeface="Calibri"/>
+              </a:rPr>
+              <a:t>ints</a:t>
+            </a:r>
+            <a:r>
+              <a:rPr sz="2200" b="0" dirty="0">
+                <a:solidFill>
+                  <a:srgbClr val="1B2A49"/>
+                </a:solidFill>
+                <a:latin typeface="Calibri"/>
+              </a:rPr>
+              <a:t>, reals, mod p)</a:t>
+            </a:r>
+            <a:r>
+              <a:rPr lang="en-US" sz="2200" b="0" dirty="0">
+                <a:solidFill>
+                  <a:srgbClr val="1B2A49"/>
+                </a:solidFill>
+                <a:latin typeface="Calibri"/>
+              </a:rPr>
+              <a:t> </a:t>
+            </a:r>
+            <a:r>
+              <a:rPr sz="2200" b="0" dirty="0">
+                <a:solidFill>
+                  <a:srgbClr val="1B2A49"/>
+                </a:solidFill>
+                <a:latin typeface="Calibri"/>
+              </a:rPr>
+              <a:t>NOT for </a:t>
+            </a:r>
+            <a:r>
+              <a:rPr sz="2200" b="0" dirty="0" err="1">
+                <a:solidFill>
+                  <a:srgbClr val="1B2A49"/>
+                </a:solidFill>
+                <a:latin typeface="Calibri"/>
+              </a:rPr>
+              <a:t>boolean</a:t>
+            </a:r>
+            <a:endParaRPr sz="2200" b="0" dirty="0">
+              <a:solidFill>
+                <a:srgbClr val="1B2A49"/>
+              </a:solidFill>
+              <a:latin typeface="Calibri"/>
+            </a:endParaRPr>
+          </a:p>
+          <a:p>
+            <a:pPr algn="l">
+              <a:spcAft>
+                <a:spcPts val="800"/>
+              </a:spcAft>
+            </a:pPr>
+            <a:r>
+              <a:rPr lang="en-US" sz="2200" dirty="0">
+                <a:solidFill>
+                  <a:srgbClr val="1B2A49"/>
+                </a:solidFill>
+                <a:latin typeface="Calibri"/>
+              </a:rPr>
+              <a:t>- </a:t>
+            </a:r>
+            <a:r>
+              <a:rPr sz="2200" b="0" dirty="0">
+                <a:solidFill>
+                  <a:srgbClr val="1B2A49"/>
+                </a:solidFill>
+                <a:latin typeface="Calibri"/>
+              </a:rPr>
+              <a:t>Squares of size 2ᵏ</a:t>
+            </a:r>
+            <a:r>
+              <a:rPr lang="en-US" sz="2200" dirty="0">
+                <a:solidFill>
+                  <a:srgbClr val="1B2A49"/>
+                </a:solidFill>
+                <a:latin typeface="Calibri"/>
+              </a:rPr>
+              <a:t> </a:t>
+            </a:r>
+            <a:r>
+              <a:rPr sz="2200" b="0" dirty="0">
+                <a:solidFill>
+                  <a:srgbClr val="1B2A49"/>
+                </a:solidFill>
+                <a:latin typeface="Calibri"/>
+              </a:rPr>
+              <a:t>otherwise pad with zeros</a:t>
+            </a:r>
+          </a:p>
+          <a:p>
+            <a:pPr algn="l">
+              <a:spcAft>
+                <a:spcPts val="800"/>
+              </a:spcAft>
+            </a:pPr>
+            <a:r>
+              <a:rPr lang="en-US" sz="2200" dirty="0">
+                <a:solidFill>
+                  <a:srgbClr val="1B2A49"/>
+                </a:solidFill>
+                <a:latin typeface="Calibri"/>
+              </a:rPr>
+              <a:t>- </a:t>
+            </a:r>
+            <a:r>
+              <a:rPr sz="2200" b="0" dirty="0">
+                <a:solidFill>
+                  <a:srgbClr val="1B2A49"/>
+                </a:solidFill>
+                <a:latin typeface="Calibri"/>
+              </a:rPr>
+              <a:t>Exact over integers; rounding error only matters with floats</a:t>
+            </a:r>
+          </a:p>
+        </p:txBody>
+      </p:sp>
+      <p:sp>
+        <p:nvSpPr>
+          <p:cNvPr id="6" name="TextBox 5"/>
           <p:cNvSpPr txBox="1"/>
           <p:nvPr/>
         </p:nvSpPr>
         <p:spPr>
           <a:xfrm>
-            <a:off x="457200" y="1371600"/>
-            <a:ext cx="5577840" cy="4572000"/>
+            <a:off x="6309360" y="1371600"/>
+            <a:ext cx="5486400" cy="3652282"/>
           </a:xfrm>
           <a:prstGeom prst="rect">
             <a:avLst/>
@@ -8574,13 +8744,13 @@
               </a:spcAft>
             </a:pPr>
             <a:r>
-              <a:rPr sz="2200" b="0">
+              <a:rPr sz="2200" b="0" dirty="0">
                 <a:solidFill>
                   <a:srgbClr val="1B2A49"/>
                 </a:solidFill>
                 <a:latin typeface="Calibri"/>
               </a:rPr>
-              <a:t>WHEN IT APPLIES</a:t>
+              <a:t>PRACTICAL LIMITS</a:t>
             </a:r>
           </a:p>
           <a:p>
@@ -8590,13 +8760,22 @@
               </a:spcAft>
             </a:pPr>
             <a:r>
-              <a:rPr sz="2200" b="0">
+              <a:rPr lang="en-US" sz="2200" dirty="0">
                 <a:solidFill>
                   <a:srgbClr val="1B2A49"/>
                 </a:solidFill>
                 <a:latin typeface="Calibri"/>
               </a:rPr>
-              <a:t>• Needs subtraction: any ring (ints, reals, mod p)</a:t>
+              <a:t>- </a:t>
+            </a:r>
+            <a:r>
+              <a:rPr sz="2200" b="0" dirty="0">
+                <a:solidFill>
+                  <a:srgbClr val="1B2A49"/>
+                </a:solidFill>
+                <a:latin typeface="Calibri"/>
+              </a:rPr>
+              <a:t>18 extra block additions per level: slower for small n</a:t>
             </a:r>
           </a:p>
           <a:p>
@@ -8606,13 +8785,40 @@
               </a:spcAft>
             </a:pPr>
             <a:r>
-              <a:rPr sz="2200" b="0">
+              <a:rPr lang="en-US" sz="2200" dirty="0">
                 <a:solidFill>
                   <a:srgbClr val="1B2A49"/>
                 </a:solidFill>
                 <a:latin typeface="Calibri"/>
               </a:rPr>
-              <a:t>• NOT for boolean or min-plus semirings (no subtraction)</a:t>
+              <a:t>- </a:t>
+            </a:r>
+            <a:r>
+              <a:rPr sz="2200" b="0" dirty="0">
+                <a:solidFill>
+                  <a:srgbClr val="1B2A49"/>
+                </a:solidFill>
+                <a:latin typeface="Calibri"/>
+              </a:rPr>
+              <a:t>Extra memory: temporaries, padding up to 4</a:t>
+            </a:r>
+            <a:r>
+              <a:rPr lang="en-US" sz="2200" b="0" dirty="0">
+                <a:solidFill>
+                  <a:srgbClr val="1B2A49"/>
+                </a:solidFill>
+                <a:latin typeface="Calibri"/>
+              </a:rPr>
+              <a:t>x</a:t>
+            </a:r>
+            <a:r>
+              <a:rPr sz="2200" b="0" dirty="0">
+                <a:solidFill>
+                  <a:srgbClr val="1B2A49"/>
+                </a:solidFill>
+                <a:latin typeface="Calibri"/>
+              </a:rPr>
+              <a:t> elements</a:t>
             </a:r>
           </a:p>
           <a:p>
@@ -8622,13 +8828,58 @@
               </a:spcAft>
             </a:pPr>
             <a:r>
-              <a:rPr sz="2200" b="0">
+              <a:rPr lang="en-US" sz="2200" dirty="0">
                 <a:solidFill>
                   <a:srgbClr val="1B2A49"/>
                 </a:solidFill>
                 <a:latin typeface="Calibri"/>
               </a:rPr>
-              <a:t>• Squares of size 2ᵏ; otherwise pad with zeros</a:t>
+              <a:t>- </a:t>
+            </a:r>
+            <a:r>
+              <a:rPr sz="2200" b="0" dirty="0">
+                <a:solidFill>
+                  <a:srgbClr val="1B2A49"/>
+                </a:solidFill>
+                <a:latin typeface="Calibri"/>
+              </a:rPr>
+              <a:t>Cache and </a:t>
+            </a:r>
+            <a:r>
+              <a:rPr sz="2200" b="0" dirty="0" err="1">
+                <a:solidFill>
+                  <a:srgbClr val="1B2A49"/>
+                </a:solidFill>
+                <a:latin typeface="Calibri"/>
+              </a:rPr>
+              <a:t>vectorised</a:t>
+            </a:r>
+            <a:r>
+              <a:rPr sz="2200" b="0" dirty="0">
+                <a:solidFill>
+                  <a:srgbClr val="1B2A49"/>
+                </a:solidFill>
+                <a:latin typeface="Calibri"/>
+              </a:rPr>
+              <a:t> BLAS </a:t>
+            </a:r>
+            <a:r>
+              <a:rPr sz="2200" b="0" dirty="0" err="1">
+                <a:solidFill>
+                  <a:srgbClr val="1B2A49"/>
+                </a:solidFill>
+                <a:latin typeface="Calibri"/>
+              </a:rPr>
+              <a:t>favour</a:t>
+            </a:r>
+            <a:r>
+              <a:rPr sz="2200" b="0" dirty="0">
+                <a:solidFill>
+                  <a:srgbClr val="1B2A49"/>
+                </a:solidFill>
+                <a:latin typeface="Calibri"/>
+              </a:rPr>
+              <a:t> classical code</a:t>
             </a:r>
           </a:p>
           <a:p>
@@ -8638,38 +8889,48 @@
               </a:spcAft>
             </a:pPr>
             <a:r>
-              <a:rPr sz="2200" b="0">
+              <a:rPr lang="en-US" sz="2200" dirty="0">
                 <a:solidFill>
                   <a:srgbClr val="1B2A49"/>
                 </a:solidFill>
                 <a:latin typeface="Calibri"/>
               </a:rPr>
-              <a:t>• Exact over integers; rounding error only matters with floats</a:t>
-            </a:r>
-          </a:p>
-        </p:txBody>
-      </p:sp>
-      <p:sp>
-        <p:nvSpPr>
-          <p:cNvPr id="6" name="TextBox 5"/>
-          <p:cNvSpPr txBox="1"/>
-          <p:nvPr/>
-        </p:nvSpPr>
-        <p:spPr>
-          <a:xfrm>
-            <a:off x="6309360" y="1371600"/>
-            <a:ext cx="5486400" cy="4572000"/>
-          </a:xfrm>
-          <a:prstGeom prst="rect">
-            <a:avLst/>
-          </a:prstGeom>
-          <a:noFill/>
-        </p:spPr>
-        <p:txBody>
-          <a:bodyPr wrap="square">
-            <a:spAutoFit/>
-          </a:bodyPr>
-          <a:lstStyle/>
+              <a:t>- </a:t>
+            </a:r>
+            <a:r>
+              <a:rPr sz="2200" b="0" dirty="0">
+                <a:solidFill>
+                  <a:srgbClr val="1B2A49"/>
+                </a:solidFill>
+                <a:latin typeface="Calibri"/>
+              </a:rPr>
+              <a:t>Break-even: roughly n </a:t>
+            </a:r>
+            <a:r>
+              <a:rPr lang="en-US" sz="2200" b="0" dirty="0">
+                <a:solidFill>
+                  <a:srgbClr val="1B2A49"/>
+                </a:solidFill>
+                <a:latin typeface="Calibri"/>
+              </a:rPr>
+              <a:t>=</a:t>
+            </a:r>
+            <a:r>
+              <a:rPr sz="2200" b="0" dirty="0">
+                <a:solidFill>
+                  <a:srgbClr val="1B2A49"/>
+                </a:solidFill>
+                <a:latin typeface="Calibri"/>
+              </a:rPr>
+              <a:t> 500-1000+ </a:t>
+            </a:r>
+            <a:endParaRPr lang="en-US" sz="2200" b="0" dirty="0">
+              <a:solidFill>
+                <a:srgbClr val="1B2A49"/>
+              </a:solidFill>
+              <a:latin typeface="Calibri"/>
+            </a:endParaRPr>
+          </a:p>
           <a:p>
             <a:pPr algn="l">
               <a:spcAft>
@@ -8677,77 +8938,40 @@
               </a:spcAft>
             </a:pPr>
             <a:r>
-              <a:rPr sz="2200" b="0">
+              <a:rPr lang="en-US" sz="2200" dirty="0">
                 <a:solidFill>
                   <a:srgbClr val="1B2A49"/>
                 </a:solidFill>
                 <a:latin typeface="Calibri"/>
               </a:rPr>
-              <a:t>PRACTICAL LIMITS</a:t>
-            </a:r>
-          </a:p>
-          <a:p>
-            <a:pPr algn="l">
-              <a:spcAft>
-                <a:spcPts val="800"/>
-              </a:spcAft>
-            </a:pPr>
-            <a:r>
-              <a:rPr sz="2200" b="0">
+              <a:t>- </a:t>
+            </a:r>
+            <a:r>
+              <a:rPr sz="2200" b="0" dirty="0">
                 <a:solidFill>
                   <a:srgbClr val="1B2A49"/>
                 </a:solidFill>
                 <a:latin typeface="Calibri"/>
               </a:rPr>
-              <a:t>• 18 extra block additions per level: slower for small n</a:t>
-            </a:r>
-          </a:p>
-          <a:p>
-            <a:pPr algn="l">
-              <a:spcAft>
-                <a:spcPts val="800"/>
-              </a:spcAft>
-            </a:pPr>
-            <a:r>
-              <a:rPr sz="2200" b="0">
+              <a:t>(Huang et al. 2016 saw </a:t>
+            </a:r>
+            <a:r>
+              <a:rPr lang="en-US" sz="2200" b="0" dirty="0">
                 <a:solidFill>
                   <a:srgbClr val="1B2A49"/>
                 </a:solidFill>
                 <a:latin typeface="Calibri"/>
               </a:rPr>
-              <a:t>• Extra memory: temporaries, padding up to 4× elements</a:t>
-            </a:r>
-          </a:p>
-          <a:p>
-            <a:pPr algn="l">
-              <a:spcAft>
-                <a:spcPts val="800"/>
-              </a:spcAft>
-            </a:pPr>
-            <a:r>
-              <a:rPr sz="2200" b="0">
+              <a:t>20%</a:t>
+            </a:r>
+            <a:r>
+              <a:rPr sz="2200" b="0" dirty="0">
                 <a:solidFill>
                   <a:srgbClr val="1B2A49"/>
                 </a:solidFill>
                 <a:latin typeface="Calibri"/>
               </a:rPr>
-              <a:t>• Cache and vectorised BLAS favour classical code</a:t>
-            </a:r>
-          </a:p>
-          <a:p>
-            <a:pPr algn="l">
-              <a:spcAft>
-                <a:spcPts val="800"/>
-              </a:spcAft>
-            </a:pPr>
-            <a:r>
-              <a:rPr sz="2200" b="0">
-                <a:solidFill>
-                  <a:srgbClr val="1B2A49"/>
-                </a:solidFill>
-                <a:latin typeface="Calibri"/>
-              </a:rPr>
-              <a:t>• Break-even: roughly n ≈ 500-1000+ (Huang et al. 2016 saw ~20% gains at n=512)</a:t>
+              <a:t> gains at n=512)</a:t>
             </a:r>
           </a:p>
         </p:txBody>
@@ -8761,7 +8985,7 @@
 </file>
 
 <file path=ppt/slides/slide8.xml><?xml version="1.0" encoding="utf-8"?>
-<p:sld xmlns:a="http://schemas.openxmlformats.org/drawingml/2006/main" xmlns:p="http://schemas.openxmlformats.org/presentationml/2006/main" xmlns:r="http://schemas.openxmlformats.org/officeDocument/2006/relationships">
+<p:sld xmlns:a="http://schemas.openxmlformats.org/drawingml/2006/main" xmlns:r="http://schemas.openxmlformats.org/officeDocument/2006/relationships" xmlns:p="http://schemas.openxmlformats.org/presentationml/2006/main">
   <p:cSld>
     <p:spTree>
       <p:nvGrpSpPr>
@@ -8769,7 +8993,14 @@
         <p:cNvGrpSpPr/>
         <p:nvPr/>
       </p:nvGrpSpPr>
-      <p:grpSpPr/>
+      <p:grpSpPr>
+        <a:xfrm>
+          <a:off x="0" y="0"/>
+          <a:ext cx="0" cy="0"/>
+          <a:chOff x="0" y="0"/>
+          <a:chExt cx="0" cy="0"/>
+        </a:xfrm>
+      </p:grpSpPr>
       <p:sp>
         <p:nvSpPr>
           <p:cNvPr id="2" name="Rectangle 1"/>
@@ -8810,6 +9041,7 @@
           <a:lstStyle/>
           <a:p>
             <a:pPr algn="ctr"/>
+            <a:endParaRPr/>
           </a:p>
         </p:txBody>
       </p:sp>
@@ -8822,7 +9054,7 @@
         <p:spPr>
           <a:xfrm>
             <a:off x="457200" y="164592"/>
-            <a:ext cx="11247120" cy="731520"/>
+            <a:ext cx="11247120" cy="584775"/>
           </a:xfrm>
           <a:prstGeom prst="rect">
             <a:avLst/>
@@ -8841,52 +9073,13 @@
               </a:spcAft>
             </a:pPr>
             <a:r>
-              <a:rPr sz="3200" b="1">
+              <a:rPr sz="3200" b="1" dirty="0">
                 <a:solidFill>
                   <a:srgbClr val="FFFFFF"/>
                 </a:solidFill>
                 <a:latin typeface="Calibri"/>
               </a:rPr>
-              <a:t>Extra research 1: numerical stability</a:t>
-            </a:r>
-          </a:p>
-        </p:txBody>
-      </p:sp>
-      <p:sp>
-        <p:nvSpPr>
-          <p:cNvPr id="4" name="TextBox 3"/>
-          <p:cNvSpPr txBox="1"/>
-          <p:nvPr/>
-        </p:nvSpPr>
-        <p:spPr>
-          <a:xfrm>
-            <a:off x="9418320" y="6446520"/>
-            <a:ext cx="2743200" cy="320040"/>
-          </a:xfrm>
-          <a:prstGeom prst="rect">
-            <a:avLst/>
-          </a:prstGeom>
-          <a:noFill/>
-        </p:spPr>
-        <p:txBody>
-          <a:bodyPr wrap="square">
-            <a:spAutoFit/>
-          </a:bodyPr>
-          <a:lstStyle/>
-          <a:p>
-            <a:pPr algn="r">
-              <a:spcAft>
-                <a:spcPts val="800"/>
-              </a:spcAft>
-            </a:pPr>
-            <a:r>
-              <a:rPr sz="1100" b="0">
-                <a:solidFill>
-                  <a:srgbClr val="555555"/>
-                </a:solidFill>
-                <a:latin typeface="Calibri"/>
-              </a:rPr>
-              <a:t>Segment 7 - Extras</a:t>
+              <a:t>Extra research: numerical stability</a:t>
             </a:r>
           </a:p>
         </p:txBody>
@@ -8897,11 +9090,17 @@
           <p:cNvGraphicFramePr>
             <a:graphicFrameLocks noGrp="1"/>
           </p:cNvGraphicFramePr>
-          <p:nvPr/>
+          <p:nvPr>
+            <p:extLst>
+              <p:ext uri="{D42A27DB-BD31-4B8C-83A1-F6EECF244321}">
+                <p14:modId xmlns:p14="http://schemas.microsoft.com/office/powerpoint/2010/main" val="1287759778"/>
+              </p:ext>
+            </p:extLst>
+          </p:nvPr>
         </p:nvGraphicFramePr>
         <p:xfrm>
           <a:off x="548640" y="1463040"/>
-          <a:ext cx="11064240" cy="3200400"/>
+          <a:ext cx="11064240" cy="3322320"/>
         </p:xfrm>
         <a:graphic>
           <a:graphicData uri="http://schemas.openxmlformats.org/drawingml/2006/table">
@@ -8910,9 +9109,27 @@
                 <a:tableStyleId>{5C22544A-7EE6-4342-B048-85BDC9FD1C3A}</a:tableStyleId>
               </a:tblPr>
               <a:tblGrid>
-                <a:gridCol w="3474720"/>
-                <a:gridCol w="3474720"/>
-                <a:gridCol w="4114800"/>
+                <a:gridCol w="3474720">
+                  <a:extLst>
+                    <a:ext uri="{9D8B030D-6E8A-4147-A177-3AD203B41FA5}">
+                      <a16:colId xmlns:a16="http://schemas.microsoft.com/office/drawing/2014/main" val="20000"/>
+                    </a:ext>
+                  </a:extLst>
+                </a:gridCol>
+                <a:gridCol w="3474720">
+                  <a:extLst>
+                    <a:ext uri="{9D8B030D-6E8A-4147-A177-3AD203B41FA5}">
+                      <a16:colId xmlns:a16="http://schemas.microsoft.com/office/drawing/2014/main" val="20001"/>
+                    </a:ext>
+                  </a:extLst>
+                </a:gridCol>
+                <a:gridCol w="4114800">
+                  <a:extLst>
+                    <a:ext uri="{9D8B030D-6E8A-4147-A177-3AD203B41FA5}">
+                      <a16:colId xmlns:a16="http://schemas.microsoft.com/office/drawing/2014/main" val="20002"/>
+                    </a:ext>
+                  </a:extLst>
+                </a:gridCol>
               </a:tblGrid>
               <a:tr h="640080">
                 <a:tc>
@@ -8928,6 +9145,7 @@
                           <a:latin typeface="Calibri"/>
                         </a:defRPr>
                       </a:pPr>
+                      <a:endParaRPr/>
                     </a:p>
                   </a:txBody>
                   <a:tcPr>
@@ -8984,6 +9202,11 @@
                     </a:solidFill>
                   </a:tcPr>
                 </a:tc>
+                <a:extLst>
+                  <a:ext uri="{0D108BD9-81ED-4DB2-BD59-A6C34878D82A}">
+                    <a16:rowId xmlns:a16="http://schemas.microsoft.com/office/drawing/2014/main" val="10000"/>
+                  </a:ext>
+                </a:extLst>
               </a:tr>
               <a:tr h="640080">
                 <a:tc>
@@ -9058,6 +9281,11 @@
                     </a:solidFill>
                   </a:tcPr>
                 </a:tc>
+                <a:extLst>
+                  <a:ext uri="{0D108BD9-81ED-4DB2-BD59-A6C34878D82A}">
+                    <a16:rowId xmlns:a16="http://schemas.microsoft.com/office/drawing/2014/main" val="10001"/>
+                  </a:ext>
+                </a:extLst>
               </a:tr>
               <a:tr h="640080">
                 <a:tc>
@@ -9132,6 +9360,11 @@
                     </a:solidFill>
                   </a:tcPr>
                 </a:tc>
+                <a:extLst>
+                  <a:ext uri="{0D108BD9-81ED-4DB2-BD59-A6C34878D82A}">
+                    <a16:rowId xmlns:a16="http://schemas.microsoft.com/office/drawing/2014/main" val="10002"/>
+                  </a:ext>
+                </a:extLst>
               </a:tr>
               <a:tr h="640080">
                 <a:tc>
@@ -9206,6 +9439,11 @@
                     </a:solidFill>
                   </a:tcPr>
                 </a:tc>
+                <a:extLst>
+                  <a:ext uri="{0D108BD9-81ED-4DB2-BD59-A6C34878D82A}">
+                    <a16:rowId xmlns:a16="http://schemas.microsoft.com/office/drawing/2014/main" val="10003"/>
+                  </a:ext>
+                </a:extLst>
               </a:tr>
               <a:tr h="640080">
                 <a:tc>
@@ -9222,6 +9460,7 @@
                         </a:defRPr>
                       </a:pPr>
                       <a:r>
+                        <a:rPr dirty="0"/>
                         <a:t>Theory (Demmel et al. 2007)</a:t>
                       </a:r>
                     </a:p>
@@ -9270,7 +9509,16 @@
                         </a:defRPr>
                       </a:pPr>
                       <a:r>
-                        <a:t>Stable in the normwise sense</a:t>
+                        <a:rPr dirty="0"/>
+                        <a:t>Stable in the </a:t>
+                      </a:r>
+                      <a:r>
+                        <a:rPr dirty="0" err="1"/>
+                        <a:t>normwise</a:t>
+                      </a:r>
+                      <a:r>
+                        <a:rPr dirty="0"/>
+                        <a:t> sense</a:t>
                       </a:r>
                     </a:p>
                   </a:txBody>
@@ -9280,6 +9528,11 @@
                     </a:solidFill>
                   </a:tcPr>
                 </a:tc>
+                <a:extLst>
+                  <a:ext uri="{0D108BD9-81ED-4DB2-BD59-A6C34878D82A}">
+                    <a16:rowId xmlns:a16="http://schemas.microsoft.com/office/drawing/2014/main" val="10004"/>
+                  </a:ext>
+                </a:extLst>
               </a:tr>
             </a:tbl>
           </a:graphicData>
@@ -9294,7 +9547,7 @@
         <p:spPr>
           <a:xfrm>
             <a:off x="548640" y="5120640"/>
-            <a:ext cx="11064240" cy="914400"/>
+            <a:ext cx="11064240" cy="430887"/>
           </a:xfrm>
           <a:prstGeom prst="rect">
             <a:avLst/>
@@ -9313,13 +9566,13 @@
               </a:spcAft>
             </a:pPr>
             <a:r>
-              <a:rPr sz="2200" b="0">
-                <a:solidFill>
-                  <a:srgbClr val="555555"/>
-                </a:solidFill>
-                <a:latin typeface="Calibri"/>
-              </a:rPr>
-              <a:t>Mitigations: stop recursing early (the threshold), and scale rows/columns before multiplying.</a:t>
+              <a:rPr sz="2200" dirty="0">
+                <a:solidFill>
+                  <a:srgbClr val="1B2A49"/>
+                </a:solidFill>
+                <a:latin typeface="Calibri"/>
+              </a:rPr>
+              <a:t>Mitigations: stop recursing early and scale rows/columns before multiplying</a:t>
             </a:r>
           </a:p>
         </p:txBody>
@@ -9333,7 +9586,7 @@
 </file>
 
 <file path=ppt/slides/slide9.xml><?xml version="1.0" encoding="utf-8"?>
-<p:sld xmlns:a="http://schemas.openxmlformats.org/drawingml/2006/main" xmlns:p="http://schemas.openxmlformats.org/presentationml/2006/main" xmlns:r="http://schemas.openxmlformats.org/officeDocument/2006/relationships">
+<p:sld xmlns:a="http://schemas.openxmlformats.org/drawingml/2006/main" xmlns:r="http://schemas.openxmlformats.org/officeDocument/2006/relationships" xmlns:p="http://schemas.openxmlformats.org/presentationml/2006/main">
   <p:cSld>
     <p:spTree>
       <p:nvGrpSpPr>
@@ -9341,7 +9594,14 @@
         <p:cNvGrpSpPr/>
         <p:nvPr/>
       </p:nvGrpSpPr>
-      <p:grpSpPr/>
+      <p:grpSpPr>
+        <a:xfrm>
+          <a:off x="0" y="0"/>
+          <a:ext cx="0" cy="0"/>
+          <a:chOff x="0" y="0"/>
+          <a:chExt cx="0" cy="0"/>
+        </a:xfrm>
+      </p:grpSpPr>
       <p:sp>
         <p:nvSpPr>
           <p:cNvPr id="2" name="Rectangle 1"/>
@@ -9382,6 +9642,7 @@
           <a:lstStyle/>
           <a:p>
             <a:pPr algn="ctr"/>
+            <a:endParaRPr/>
           </a:p>
         </p:txBody>
       </p:sp>
@@ -9394,7 +9655,7 @@
         <p:spPr>
           <a:xfrm>
             <a:off x="457200" y="164592"/>
-            <a:ext cx="11247120" cy="731520"/>
+            <a:ext cx="11247120" cy="584775"/>
           </a:xfrm>
           <a:prstGeom prst="rect">
             <a:avLst/>
@@ -9413,52 +9674,13 @@
               </a:spcAft>
             </a:pPr>
             <a:r>
-              <a:rPr sz="3200" b="1">
+              <a:rPr sz="3200" b="1" dirty="0">
                 <a:solidFill>
                   <a:srgbClr val="FFFFFF"/>
                 </a:solidFill>
                 <a:latin typeface="Calibri"/>
               </a:rPr>
-              <a:t>Extra research 2: is 7 optimal? What came next</a:t>
-            </a:r>
-          </a:p>
-        </p:txBody>
-      </p:sp>
-      <p:sp>
-        <p:nvSpPr>
-          <p:cNvPr id="4" name="TextBox 3"/>
-          <p:cNvSpPr txBox="1"/>
-          <p:nvPr/>
-        </p:nvSpPr>
-        <p:spPr>
-          <a:xfrm>
-            <a:off x="9418320" y="6446520"/>
-            <a:ext cx="2743200" cy="320040"/>
-          </a:xfrm>
-          <a:prstGeom prst="rect">
-            <a:avLst/>
-          </a:prstGeom>
-          <a:noFill/>
-        </p:spPr>
-        <p:txBody>
-          <a:bodyPr wrap="square">
-            <a:spAutoFit/>
-          </a:bodyPr>
-          <a:lstStyle/>
-          <a:p>
-            <a:pPr algn="r">
-              <a:spcAft>
-                <a:spcPts val="800"/>
-              </a:spcAft>
-            </a:pPr>
-            <a:r>
-              <a:rPr sz="1100" b="0">
-                <a:solidFill>
-                  <a:srgbClr val="555555"/>
-                </a:solidFill>
-                <a:latin typeface="Calibri"/>
-              </a:rPr>
-              <a:t>Segment 7 - Extras</a:t>
+              <a:t>Extra research: is 7 optimal? What came next</a:t>
             </a:r>
           </a:p>
         </p:txBody>
@@ -9496,7 +9718,7 @@
         <p:spPr>
           <a:xfrm>
             <a:off x="274320" y="5436107"/>
-            <a:ext cx="5852160" cy="457200"/>
+            <a:ext cx="5852160" cy="261610"/>
           </a:xfrm>
           <a:prstGeom prst="rect">
             <a:avLst/>
@@ -9515,13 +9737,31 @@
               </a:spcAft>
             </a:pPr>
             <a:r>
-              <a:rPr sz="1100" b="0">
+              <a:rPr sz="1100" b="0" dirty="0">
                 <a:solidFill>
                   <a:srgbClr val="555555"/>
                 </a:solidFill>
                 <a:latin typeface="Calibri"/>
               </a:rPr>
-              <a:t>Exponent ω over time. J. Burghardt, CC BY-SA 4.0</a:t>
+              <a:t>Exponent </a:t>
+            </a:r>
+            <a:r>
+              <a:rPr lang="en-US" sz="1100" b="0" dirty="0">
+                <a:solidFill>
+                  <a:srgbClr val="555555"/>
+                </a:solidFill>
+                <a:latin typeface="Calibri"/>
+              </a:rPr>
+              <a:t>omega</a:t>
+            </a:r>
+            <a:r>
+              <a:rPr sz="1100" b="0" dirty="0">
+                <a:solidFill>
+                  <a:srgbClr val="555555"/>
+                </a:solidFill>
+                <a:latin typeface="Calibri"/>
+              </a:rPr>
+              <a:t> over time</a:t>
             </a:r>
           </a:p>
         </p:txBody>
@@ -9535,7 +9775,7 @@
         <p:spPr>
           <a:xfrm>
             <a:off x="6309360" y="1371600"/>
-            <a:ext cx="5577840" cy="4846320"/>
+            <a:ext cx="5577840" cy="3088025"/>
           </a:xfrm>
           <a:prstGeom prst="rect">
             <a:avLst/>
@@ -9554,13 +9794,31 @@
               </a:spcAft>
             </a:pPr>
             <a:r>
-              <a:rPr sz="2100" b="0">
+              <a:rPr sz="2100" b="0" dirty="0">
                 <a:solidFill>
                   <a:srgbClr val="1B2A49"/>
                 </a:solidFill>
                 <a:latin typeface="Calibri"/>
               </a:rPr>
-              <a:t>• Hopcroft &amp; Kerr (1971), Winograd (1971): 7 is optimal for 2×2</a:t>
+              <a:t>• Hopcroft &amp; Kerr (1971), Winograd (1971): 7 is optimal for 2</a:t>
+            </a:r>
+            <a:r>
+              <a:rPr lang="en-US" sz="2100" b="0" dirty="0">
+                <a:solidFill>
+                  <a:srgbClr val="1B2A49"/>
+                </a:solidFill>
+                <a:latin typeface="Calibri"/>
+              </a:rPr>
+              <a:t>x</a:t>
+            </a:r>
+            <a:r>
+              <a:rPr sz="2100" b="0" dirty="0">
+                <a:solidFill>
+                  <a:srgbClr val="1B2A49"/>
+                </a:solidFill>
+                <a:latin typeface="Calibri"/>
+              </a:rPr>
+              <a:t>2</a:t>
             </a:r>
           </a:p>
           <a:p>
@@ -9570,7 +9828,7 @@
               </a:spcAft>
             </a:pPr>
             <a:r>
-              <a:rPr sz="2100" b="0">
+              <a:rPr sz="2100" b="0" dirty="0">
                 <a:solidFill>
                   <a:srgbClr val="1B2A49"/>
                 </a:solidFill>
@@ -9586,13 +9844,49 @@
               </a:spcAft>
             </a:pPr>
             <a:r>
-              <a:rPr sz="2100" b="0">
+              <a:rPr sz="2100" b="0" dirty="0">
                 <a:solidFill>
                   <a:srgbClr val="1B2A49"/>
                 </a:solidFill>
                 <a:latin typeface="Calibri"/>
               </a:rPr>
-              <a:t>• AlphaTensor (DeepMind, 2022): 47 multiplications for 4×4 over GF(2) vs 49</a:t>
+              <a:t>• </a:t>
+            </a:r>
+            <a:r>
+              <a:rPr sz="2100" b="0" dirty="0" err="1">
+                <a:solidFill>
+                  <a:srgbClr val="1B2A49"/>
+                </a:solidFill>
+                <a:latin typeface="Calibri"/>
+              </a:rPr>
+              <a:t>AlphaTensor</a:t>
+            </a:r>
+            <a:r>
+              <a:rPr sz="2100" b="0" dirty="0">
+                <a:solidFill>
+                  <a:srgbClr val="1B2A49"/>
+                </a:solidFill>
+                <a:latin typeface="Calibri"/>
+              </a:rPr>
+              <a:t> (DeepMind, 2022): 47 multiplications for 4</a:t>
+            </a:r>
+            <a:r>
+              <a:rPr lang="en-US" sz="2100" b="0" dirty="0">
+                <a:solidFill>
+                  <a:srgbClr val="1B2A49"/>
+                </a:solidFill>
+                <a:latin typeface="Calibri"/>
+              </a:rPr>
+              <a:t>x</a:t>
+            </a:r>
+            <a:r>
+              <a:rPr sz="2100" b="0" dirty="0">
+                <a:solidFill>
+                  <a:srgbClr val="1B2A49"/>
+                </a:solidFill>
+                <a:latin typeface="Calibri"/>
+              </a:rPr>
+              <a:t>4 over GF(2) vs 49</a:t>
             </a:r>
           </a:p>
           <a:p>
@@ -9602,13 +9896,31 @@
               </a:spcAft>
             </a:pPr>
             <a:r>
-              <a:rPr sz="2100" b="0">
+              <a:rPr sz="2100" b="0" dirty="0">
                 <a:solidFill>
                   <a:srgbClr val="1B2A49"/>
                 </a:solidFill>
                 <a:latin typeface="Calibri"/>
               </a:rPr>
-              <a:t>• Best known exponent today: ω &lt; 2.371339 (Alman et al., 2024)</a:t>
+              <a:t>• Best known exponent today: </a:t>
+            </a:r>
+            <a:r>
+              <a:rPr lang="en-US" sz="2100" b="0" dirty="0">
+                <a:solidFill>
+                  <a:srgbClr val="1B2A49"/>
+                </a:solidFill>
+                <a:latin typeface="Calibri"/>
+              </a:rPr>
+              <a:t>omega</a:t>
+            </a:r>
+            <a:r>
+              <a:rPr sz="2100" b="0" dirty="0">
+                <a:solidFill>
+                  <a:srgbClr val="1B2A49"/>
+                </a:solidFill>
+                <a:latin typeface="Calibri"/>
+              </a:rPr>
+              <a:t> &lt; 2.371339 (Alman et al., 2024)</a:t>
             </a:r>
           </a:p>
           <a:p>
@@ -9618,13 +9930,13 @@
               </a:spcAft>
             </a:pPr>
             <a:r>
-              <a:rPr sz="2100" b="0">
+              <a:rPr sz="2100" b="0" dirty="0">
                 <a:solidFill>
                   <a:srgbClr val="1B2A49"/>
                 </a:solidFill>
                 <a:latin typeface="Calibri"/>
               </a:rPr>
-              <a:t>• Those record algorithms are galactic - never used in practice</a:t>
+              <a:t>• Those algorithms are never used in practice</a:t>
             </a:r>
           </a:p>
         </p:txBody>
@@ -9968,44 +10280,44 @@
         <a:sysClr val="window" lastClr="FFFFFF"/>
       </a:lt1>
       <a:dk2>
-        <a:srgbClr val="1F497D"/>
+        <a:srgbClr val="0E2841"/>
       </a:dk2>
       <a:lt2>
-        <a:srgbClr val="EEECE1"/>
+        <a:srgbClr val="E8E8E8"/>
       </a:lt2>
       <a:accent1>
-        <a:srgbClr val="4F81BD"/>
+        <a:srgbClr val="156082"/>
       </a:accent1>
       <a:accent2>
-        <a:srgbClr val="C0504D"/>
+        <a:srgbClr val="E97132"/>
       </a:accent2>
       <a:accent3>
-        <a:srgbClr val="9BBB59"/>
+        <a:srgbClr val="196B24"/>
       </a:accent3>
       <a:accent4>
-        <a:srgbClr val="8064A2"/>
+        <a:srgbClr val="0F9ED5"/>
       </a:accent4>
       <a:accent5>
-        <a:srgbClr val="4BACC6"/>
+        <a:srgbClr val="A02B93"/>
       </a:accent5>
       <a:accent6>
-        <a:srgbClr val="F79646"/>
+        <a:srgbClr val="4EA72E"/>
       </a:accent6>
       <a:hlink>
-        <a:srgbClr val="0000FF"/>
+        <a:srgbClr val="467886"/>
       </a:hlink>
       <a:folHlink>
-        <a:srgbClr val="800080"/>
+        <a:srgbClr val="96607D"/>
       </a:folHlink>
     </a:clrScheme>
     <a:fontScheme name="Office">
       <a:majorFont>
-        <a:latin typeface="Calibri"/>
+        <a:latin typeface="Aptos Display" panose="02110004020202020204"/>
         <a:ea typeface=""/>
         <a:cs typeface=""/>
-        <a:font script="Jpan" typeface="ＭＳ Ｐゴシック"/>
+        <a:font script="Jpan" typeface="游ゴシック Light"/>
         <a:font script="Hang" typeface="맑은 고딕"/>
-        <a:font script="Hans" typeface="宋体"/>
+        <a:font script="Hans" typeface="等线 Light"/>
         <a:font script="Hant" typeface="新細明體"/>
         <a:font script="Arab" typeface="Times New Roman"/>
         <a:font script="Hebr" typeface="Times New Roman"/>
@@ -10033,14 +10345,31 @@
         <a:font script="Viet" typeface="Times New Roman"/>
         <a:font script="Uigh" typeface="Microsoft Uighur"/>
         <a:font script="Geor" typeface="Sylfaen"/>
+        <a:font script="Armn" typeface="Arial"/>
+        <a:font script="Bugi" typeface="Leelawadee UI"/>
+        <a:font script="Bopo" typeface="Microsoft JhengHei"/>
+        <a:font script="Java" typeface="Javanese Text"/>
+        <a:font script="Lisu" typeface="Segoe UI"/>
+        <a:font script="Mymr" typeface="Myanmar Text"/>
+        <a:font script="Nkoo" typeface="Ebrima"/>
+        <a:font script="Olck" typeface="Nirmala UI"/>
+        <a:font script="Osma" typeface="Ebrima"/>
+        <a:font script="Phag" typeface="Phagspa"/>
+        <a:font script="Syrn" typeface="Estrangelo Edessa"/>
+        <a:font script="Syrj" typeface="Estrangelo Edessa"/>
+        <a:font script="Syre" typeface="Estrangelo Edessa"/>
+        <a:font script="Sora" typeface="Nirmala UI"/>
+        <a:font script="Tale" typeface="Microsoft Tai Le"/>
+        <a:font script="Talu" typeface="Microsoft New Tai Lue"/>
+        <a:font script="Tfng" typeface="Ebrima"/>
       </a:majorFont>
       <a:minorFont>
-        <a:latin typeface="Calibri"/>
+        <a:latin typeface="Aptos" panose="02110004020202020204"/>
         <a:ea typeface=""/>
         <a:cs typeface=""/>
-        <a:font script="Jpan" typeface="ＭＳ Ｐゴシック"/>
+        <a:font script="Jpan" typeface="游ゴシック"/>
         <a:font script="Hang" typeface="맑은 고딕"/>
-        <a:font script="Hans" typeface="宋体"/>
+        <a:font script="Hans" typeface="等线"/>
         <a:font script="Hant" typeface="新細明體"/>
         <a:font script="Arab" typeface="Arial"/>
         <a:font script="Hebr" typeface="Arial"/>
@@ -10068,6 +10397,23 @@
         <a:font script="Viet" typeface="Arial"/>
         <a:font script="Uigh" typeface="Microsoft Uighur"/>
         <a:font script="Geor" typeface="Sylfaen"/>
+        <a:font script="Armn" typeface="Arial"/>
+        <a:font script="Bugi" typeface="Leelawadee UI"/>
+        <a:font script="Bopo" typeface="Microsoft JhengHei"/>
+        <a:font script="Java" typeface="Javanese Text"/>
+        <a:font script="Lisu" typeface="Segoe UI"/>
+        <a:font script="Mymr" typeface="Myanmar Text"/>
+        <a:font script="Nkoo" typeface="Ebrima"/>
+        <a:font script="Olck" typeface="Nirmala UI"/>
+        <a:font script="Osma" typeface="Ebrima"/>
+        <a:font script="Phag" typeface="Phagspa"/>
+        <a:font script="Syrn" typeface="Estrangelo Edessa"/>
+        <a:font script="Syrj" typeface="Estrangelo Edessa"/>
+        <a:font script="Syre" typeface="Estrangelo Edessa"/>
+        <a:font script="Sora" typeface="Nirmala UI"/>
+        <a:font script="Tale" typeface="Microsoft Tai Le"/>
+        <a:font script="Talu" typeface="Microsoft New Tai Lue"/>
+        <a:font script="Tfng" typeface="Ebrima"/>
       </a:minorFont>
     </a:fontScheme>
     <a:fmtScheme name="Office">
@@ -10079,180 +10425,136 @@
           <a:gsLst>
             <a:gs pos="0">
               <a:schemeClr val="phClr">
-                <a:tint val="50000"/>
-                <a:satMod val="300000"/>
+                <a:lumMod val="110000"/>
+                <a:satMod val="105000"/>
+                <a:tint val="67000"/>
               </a:schemeClr>
             </a:gs>
-            <a:gs pos="35000">
+            <a:gs pos="50000">
               <a:schemeClr val="phClr">
-                <a:tint val="37000"/>
-                <a:satMod val="300000"/>
+                <a:lumMod val="105000"/>
+                <a:satMod val="103000"/>
+                <a:tint val="73000"/>
               </a:schemeClr>
             </a:gs>
             <a:gs pos="100000">
               <a:schemeClr val="phClr">
-                <a:tint val="15000"/>
-                <a:satMod val="350000"/>
+                <a:lumMod val="105000"/>
+                <a:satMod val="109000"/>
+                <a:tint val="81000"/>
               </a:schemeClr>
             </a:gs>
           </a:gsLst>
-          <a:lin ang="16200000" scaled="1"/>
+          <a:lin ang="5400000" scaled="0"/>
         </a:gradFill>
         <a:gradFill rotWithShape="1">
           <a:gsLst>
             <a:gs pos="0">
               <a:schemeClr val="phClr">
-                <a:tint val="100000"/>
+                <a:satMod val="103000"/>
+                <a:lumMod val="102000"/>
+                <a:tint val="94000"/>
+              </a:schemeClr>
+            </a:gs>
+            <a:gs pos="50000">
+              <a:schemeClr val="phClr">
+                <a:satMod val="110000"/>
+                <a:lumMod val="100000"/>
                 <a:shade val="100000"/>
-                <a:satMod val="130000"/>
               </a:schemeClr>
             </a:gs>
             <a:gs pos="100000">
               <a:schemeClr val="phClr">
-                <a:tint val="50000"/>
-                <a:shade val="100000"/>
-                <a:satMod val="350000"/>
+                <a:lumMod val="99000"/>
+                <a:satMod val="120000"/>
+                <a:shade val="78000"/>
               </a:schemeClr>
             </a:gs>
           </a:gsLst>
-          <a:lin ang="16200000" scaled="0"/>
+          <a:lin ang="5400000" scaled="0"/>
         </a:gradFill>
       </a:fillStyleLst>
       <a:lnStyleLst>
-        <a:ln w="9525" cap="flat" cmpd="sng" algn="ctr">
+        <a:ln w="12700" cap="flat" cmpd="sng" algn="ctr">
           <a:solidFill>
-            <a:schemeClr val="phClr">
-              <a:shade val="95000"/>
-              <a:satMod val="105000"/>
-            </a:schemeClr>
+            <a:schemeClr val="phClr"/>
           </a:solidFill>
           <a:prstDash val="solid"/>
+          <a:miter lim="800000"/>
+        </a:ln>
+        <a:ln w="19050" cap="flat" cmpd="sng" algn="ctr">
+          <a:solidFill>
+            <a:schemeClr val="phClr"/>
+          </a:solidFill>
+          <a:prstDash val="solid"/>
+          <a:miter lim="800000"/>
         </a:ln>
         <a:ln w="25400" cap="flat" cmpd="sng" algn="ctr">
           <a:solidFill>
             <a:schemeClr val="phClr"/>
           </a:solidFill>
           <a:prstDash val="solid"/>
-        </a:ln>
-        <a:ln w="38100" cap="flat" cmpd="sng" algn="ctr">
-          <a:solidFill>
-            <a:schemeClr val="phClr"/>
-          </a:solidFill>
-          <a:prstDash val="solid"/>
+          <a:miter lim="800000"/>
         </a:ln>
       </a:lnStyleLst>
       <a:effectStyleLst>
         <a:effectStyle>
+          <a:effectLst/>
+        </a:effectStyle>
+        <a:effectStyle>
+          <a:effectLst/>
+        </a:effectStyle>
+        <a:effectStyle>
           <a:effectLst>
-            <a:outerShdw blurRad="40000" dist="20000" dir="5400000" rotWithShape="0">
+            <a:outerShdw blurRad="57150" dist="19050" dir="5400000" algn="ctr" rotWithShape="0">
               <a:srgbClr val="000000">
-                <a:alpha val="38000"/>
+                <a:alpha val="63000"/>
               </a:srgbClr>
             </a:outerShdw>
           </a:effectLst>
-        </a:effectStyle>
-        <a:effectStyle>
-          <a:effectLst>
-            <a:outerShdw blurRad="40000" dist="23000" dir="5400000" rotWithShape="0">
-              <a:srgbClr val="000000">
-                <a:alpha val="35000"/>
-              </a:srgbClr>
-            </a:outerShdw>
-          </a:effectLst>
-        </a:effectStyle>
-        <a:effectStyle>
-          <a:effectLst>
-            <a:outerShdw blurRad="40000" dist="23000" dir="5400000" rotWithShape="0">
-              <a:srgbClr val="000000">
-                <a:alpha val="35000"/>
-              </a:srgbClr>
-            </a:outerShdw>
-          </a:effectLst>
-          <a:scene3d>
-            <a:camera prst="orthographicFront">
-              <a:rot lat="0" lon="0" rev="0"/>
-            </a:camera>
-            <a:lightRig rig="threePt" dir="t">
-              <a:rot lat="0" lon="0" rev="1200000"/>
-            </a:lightRig>
-          </a:scene3d>
-          <a:sp3d>
-            <a:bevelT w="63500" h="25400"/>
-          </a:sp3d>
         </a:effectStyle>
       </a:effectStyleLst>
       <a:bgFillStyleLst>
         <a:solidFill>
           <a:schemeClr val="phClr"/>
         </a:solidFill>
+        <a:solidFill>
+          <a:schemeClr val="phClr">
+            <a:tint val="95000"/>
+            <a:satMod val="170000"/>
+          </a:schemeClr>
+        </a:solidFill>
         <a:gradFill rotWithShape="1">
           <a:gsLst>
             <a:gs pos="0">
               <a:schemeClr val="phClr">
-                <a:tint val="40000"/>
-                <a:satMod val="350000"/>
+                <a:tint val="93000"/>
+                <a:satMod val="150000"/>
+                <a:shade val="98000"/>
+                <a:lumMod val="102000"/>
               </a:schemeClr>
             </a:gs>
-            <a:gs pos="40000">
+            <a:gs pos="50000">
               <a:schemeClr val="phClr">
-                <a:tint val="45000"/>
-                <a:shade val="99000"/>
-                <a:satMod val="350000"/>
+                <a:tint val="98000"/>
+                <a:satMod val="130000"/>
+                <a:shade val="90000"/>
+                <a:lumMod val="103000"/>
               </a:schemeClr>
             </a:gs>
             <a:gs pos="100000">
               <a:schemeClr val="phClr">
-                <a:shade val="20000"/>
-                <a:satMod val="255000"/>
+                <a:shade val="63000"/>
+                <a:satMod val="120000"/>
               </a:schemeClr>
             </a:gs>
           </a:gsLst>
-          <a:path path="circle">
-            <a:fillToRect l="50000" t="-80000" r="50000" b="180000"/>
-          </a:path>
-        </a:gradFill>
-        <a:gradFill rotWithShape="1">
-          <a:gsLst>
-            <a:gs pos="0">
-              <a:schemeClr val="phClr">
-                <a:tint val="80000"/>
-                <a:satMod val="300000"/>
-              </a:schemeClr>
-            </a:gs>
-            <a:gs pos="100000">
-              <a:schemeClr val="phClr">
-                <a:shade val="30000"/>
-                <a:satMod val="200000"/>
-              </a:schemeClr>
-            </a:gs>
-          </a:gsLst>
-          <a:path path="circle">
-            <a:fillToRect l="50000" t="50000" r="50000" b="50000"/>
-          </a:path>
+          <a:lin ang="5400000" scaled="0"/>
         </a:gradFill>
       </a:bgFillStyleLst>
     </a:fmtScheme>
   </a:themeElements>
   <a:objectDefaults>
-    <a:spDef>
-      <a:spPr/>
-      <a:bodyPr/>
-      <a:lstStyle/>
-      <a:style>
-        <a:lnRef idx="1">
-          <a:schemeClr val="accent1"/>
-        </a:lnRef>
-        <a:fillRef idx="3">
-          <a:schemeClr val="accent1"/>
-        </a:fillRef>
-        <a:effectRef idx="2">
-          <a:schemeClr val="accent1"/>
-        </a:effectRef>
-        <a:fontRef idx="minor">
-          <a:schemeClr val="lt1"/>
-        </a:fontRef>
-      </a:style>
-    </a:spDef>
     <a:lnDef>
       <a:spPr/>
       <a:bodyPr/>
@@ -10274,5 +10576,10 @@
     </a:lnDef>
   </a:objectDefaults>
   <a:extraClrSchemeLst/>
+  <a:extLst>
+    <a:ext uri="{05A4C25C-085E-4340-85A3-A5531E510DB2}">
+      <thm15:themeFamily xmlns:thm15="http://schemas.microsoft.com/office/thememl/2012/main" name="Office Theme" id="{2E142A2C-CD16-42D6-873A-C26D2A0506FA}" vid="{1BDDFF52-6CD6-40A5-AB3C-68EB2F1E4D0A}"/>
+    </a:ext>
+  </a:extLst>
 </a:theme>
 </file>